--- a/prezentaciya_kultura_online_full.pptx
+++ b/prezentaciya_kultura_online_full.pptx
@@ -21,6 +21,7 @@
     <p:sldId id="269" r:id="rId20"/>
     <p:sldId id="270" r:id="rId21"/>
     <p:sldId id="271" r:id="rId22"/>
+    <p:sldId id="272" r:id="rId23"/>
   </p:sldIdLst>
   <p:sldSz cx="12191695" cy="6858000" type="screen4x3"/>
   <p:notesSz cx="6858000" cy="9144000"/>
@@ -3148,20 +3149,20 @@
       </p:sp>
       <p:sp>
         <p:nvSpPr>
-          <p:cNvPr id="3" name="Rectangle 2"/>
+          <p:cNvPr id="3" name="Right Triangle 2"/>
           <p:cNvSpPr/>
           <p:nvPr/>
         </p:nvSpPr>
         <p:spPr>
-          <a:xfrm>
+          <a:xfrm rot="10800000">
             <a:off x="0" y="0"/>
-            <a:ext cx="274320" cy="6858000"/>
-          </a:xfrm>
-          <a:prstGeom prst="rect">
+            <a:ext cx="1828800" cy="6858000"/>
+          </a:xfrm>
+          <a:prstGeom prst="rtTriangle">
             <a:avLst/>
           </a:prstGeom>
           <a:solidFill>
-            <a:srgbClr val="FF6B35"/>
+            <a:srgbClr val="34BFA3"/>
           </a:solidFill>
           <a:ln>
             <a:noFill/>
@@ -3197,8 +3198,8 @@
         </p:nvSpPr>
         <p:spPr>
           <a:xfrm>
-            <a:off x="914400" y="2286000"/>
-            <a:ext cx="10058400" cy="1828800"/>
+            <a:off x="2286000" y="2286000"/>
+            <a:ext cx="9448495" cy="1828800"/>
           </a:xfrm>
           <a:prstGeom prst="rect">
             <a:avLst/>
@@ -3211,15 +3212,14 @@
           </a:bodyPr>
           <a:lstStyle/>
           <a:p>
-            <a:pPr algn="l"/>
-            <a:r>
-              <a:rPr sz="5400" b="1">
+            <a:r>
+              <a:rPr sz="6400" b="1">
                 <a:solidFill>
                   <a:srgbClr val="FFFFFF"/>
                 </a:solidFill>
-                <a:latin typeface="Arial"/>
+                <a:latin typeface="Google Sans"/>
               </a:rPr>
-              <a:t/>
+              <a:t>Культура Онлайн</a:t>
             </a:r>
           </a:p>
         </p:txBody>
@@ -3232,8 +3232,8 @@
         </p:nvSpPr>
         <p:spPr>
           <a:xfrm>
-            <a:off x="914400" y="3840480"/>
-            <a:ext cx="10058400" cy="457200"/>
+            <a:off x="2286000" y="3840480"/>
+            <a:ext cx="9448495" cy="914400"/>
           </a:xfrm>
           <a:prstGeom prst="rect">
             <a:avLst/>
@@ -3246,85 +3246,14 @@
           </a:bodyPr>
           <a:lstStyle/>
           <a:p>
-            <a:pPr algn="l"/>
-            <a:r>
-              <a:rPr sz="2400" b="0">
+            <a:r>
+              <a:rPr sz="3200" b="0">
                 <a:solidFill>
                   <a:srgbClr val="FFFFFF"/>
                 </a:solidFill>
-                <a:latin typeface="Arial"/>
+                <a:latin typeface="Google Sans"/>
               </a:rPr>
-              <a:t/>
-            </a:r>
-          </a:p>
-        </p:txBody>
-      </p:sp>
-      <p:sp>
-        <p:nvSpPr>
-          <p:cNvPr id="6" name="TextBox 5"/>
-          <p:cNvSpPr txBox="1"/>
-          <p:nvPr/>
-        </p:nvSpPr>
-        <p:spPr>
-          <a:xfrm>
-            <a:off x="914400" y="4206240"/>
-            <a:ext cx="10058400" cy="457200"/>
-          </a:xfrm>
-          <a:prstGeom prst="rect">
-            <a:avLst/>
-          </a:prstGeom>
-          <a:noFill/>
-        </p:spPr>
-        <p:txBody>
-          <a:bodyPr wrap="none">
-            <a:spAutoFit/>
-          </a:bodyPr>
-          <a:lstStyle/>
-          <a:p>
-            <a:pPr algn="l"/>
-            <a:r>
-              <a:rPr sz="2400" b="0">
-                <a:solidFill>
-                  <a:srgbClr val="FFFFFF"/>
-                </a:solidFill>
-                <a:latin typeface="Arial"/>
-              </a:rPr>
-              <a:t/>
-            </a:r>
-          </a:p>
-        </p:txBody>
-      </p:sp>
-      <p:sp>
-        <p:nvSpPr>
-          <p:cNvPr id="7" name="TextBox 6"/>
-          <p:cNvSpPr txBox="1"/>
-          <p:nvPr/>
-        </p:nvSpPr>
-        <p:spPr>
-          <a:xfrm>
-            <a:off x="914400" y="4572000"/>
-            <a:ext cx="10058400" cy="457200"/>
-          </a:xfrm>
-          <a:prstGeom prst="rect">
-            <a:avLst/>
-          </a:prstGeom>
-          <a:noFill/>
-        </p:spPr>
-        <p:txBody>
-          <a:bodyPr wrap="none">
-            <a:spAutoFit/>
-          </a:bodyPr>
-          <a:lstStyle/>
-          <a:p>
-            <a:pPr algn="l"/>
-            <a:r>
-              <a:rPr sz="2400" b="0">
-                <a:solidFill>
-                  <a:srgbClr val="FFFFFF"/>
-                </a:solidFill>
-                <a:latin typeface="Arial"/>
-              </a:rPr>
-              <a:t/>
+              <a:t>Цифровая платформа для учреждений культуры</a:t>
             </a:r>
           </a:p>
         </p:txBody>
@@ -3362,7 +3291,7 @@
             <a:avLst/>
           </a:prstGeom>
           <a:solidFill>
-            <a:srgbClr val="FAFAFC"/>
+            <a:srgbClr val="F5F5F5"/>
           </a:solidFill>
           <a:ln>
             <a:noFill/>
@@ -3392,24 +3321,25 @@
       </p:sp>
       <p:sp>
         <p:nvSpPr>
-          <p:cNvPr id="3" name="Rectangle 2"/>
+          <p:cNvPr id="3" name="Rounded Rectangle 2"/>
           <p:cNvSpPr/>
           <p:nvPr/>
         </p:nvSpPr>
         <p:spPr>
           <a:xfrm>
-            <a:off x="0" y="0"/>
-            <a:ext cx="274320" cy="6858000"/>
-          </a:xfrm>
-          <a:prstGeom prst="rect">
+            <a:off x="914400" y="1371600"/>
+            <a:ext cx="10362895" cy="4572000"/>
+          </a:xfrm>
+          <a:prstGeom prst="roundRect">
             <a:avLst/>
           </a:prstGeom>
           <a:solidFill>
-            <a:srgbClr val="FF6B35"/>
+            <a:srgbClr val="EBEBEB"/>
           </a:solidFill>
           <a:ln>
             <a:noFill/>
           </a:ln>
+          <a:effectLst/>
         </p:spPr>
         <p:style>
           <a:lnRef idx="1">
@@ -3441,8 +3371,8 @@
         </p:nvSpPr>
         <p:spPr>
           <a:xfrm>
-            <a:off x="731520" y="274320"/>
-            <a:ext cx="10515600" cy="914400"/>
+            <a:off x="914400" y="457200"/>
+            <a:ext cx="10362895" cy="914400"/>
           </a:xfrm>
           <a:prstGeom prst="rect">
             <a:avLst/>
@@ -3456,33 +3386,75 @@
           <a:lstStyle/>
           <a:p>
             <a:r>
-              <a:rPr sz="3600" b="1">
+              <a:rPr sz="4800" b="1">
                 <a:solidFill>
-                  <a:srgbClr val="141832"/>
+                  <a:srgbClr val="333333"/>
                 </a:solidFill>
-                <a:latin typeface="Arial"/>
+                <a:latin typeface="Google Sans"/>
               </a:rPr>
-              <a:t/>
-            </a:r>
-          </a:p>
-        </p:txBody>
-      </p:sp>
-      <p:sp>
-        <p:nvSpPr>
-          <p:cNvPr id="5" name="Rectangle 4"/>
+              <a:t>Объем рынка</a:t>
+            </a:r>
+          </a:p>
+        </p:txBody>
+      </p:sp>
+      <p:sp>
+        <p:nvSpPr>
+          <p:cNvPr id="5" name="TextBox 4"/>
+          <p:cNvSpPr txBox="1"/>
+          <p:nvPr/>
+        </p:nvSpPr>
+        <p:spPr>
+          <a:xfrm>
+            <a:off x="1188720" y="1645920"/>
+            <a:ext cx="9814255" cy="4023360"/>
+          </a:xfrm>
+          <a:prstGeom prst="rect">
+            <a:avLst/>
+          </a:prstGeom>
+          <a:noFill/>
+        </p:spPr>
+        <p:txBody>
+          <a:bodyPr wrap="square">
+            <a:spAutoFit/>
+          </a:bodyPr>
+          <a:lstStyle/>
+          <a:p>
+            <a:r>
+              <a:rPr sz="2400" b="0">
+                <a:solidFill>
+                  <a:srgbClr val="333333"/>
+                </a:solidFill>
+                <a:latin typeface="Google Sans"/>
+              </a:rPr>
+              <a:t>TAM: 750 млн руб. (все учреждения культуры РФ)</a:t>
+            </a:r>
+            <a:br/>
+            <a:r>
+              <a:t>SAM: 200 млн руб. (учреждения в цифровизации)</a:t>
+            </a:r>
+            <a:br/>
+            <a:r>
+              <a:t>SOM: 10 млн руб./год (план на 3 год)</a:t>
+            </a:r>
+          </a:p>
+        </p:txBody>
+      </p:sp>
+      <p:sp>
+        <p:nvSpPr>
+          <p:cNvPr id="6" name="Rectangle 5"/>
           <p:cNvSpPr/>
           <p:nvPr/>
         </p:nvSpPr>
         <p:spPr>
           <a:xfrm>
-            <a:off x="731520" y="1051560"/>
-            <a:ext cx="10515600" cy="27432"/>
+            <a:off x="0" y="914400"/>
+            <a:ext cx="182880" cy="5029200"/>
           </a:xfrm>
           <a:prstGeom prst="rect">
             <a:avLst/>
           </a:prstGeom>
           <a:solidFill>
-            <a:srgbClr val="FF6B35"/>
+            <a:srgbClr val="34BFA3"/>
           </a:solidFill>
           <a:ln>
             <a:noFill/>
@@ -3507,40 +3479,6 @@
           <a:lstStyle/>
           <a:p>
             <a:pPr algn="ctr"/>
-          </a:p>
-        </p:txBody>
-      </p:sp>
-      <p:sp>
-        <p:nvSpPr>
-          <p:cNvPr id="6" name="TextBox 5"/>
-          <p:cNvSpPr txBox="1"/>
-          <p:nvPr/>
-        </p:nvSpPr>
-        <p:spPr>
-          <a:xfrm>
-            <a:off x="731520" y="1371600"/>
-            <a:ext cx="10515600" cy="548640"/>
-          </a:xfrm>
-          <a:prstGeom prst="rect">
-            <a:avLst/>
-          </a:prstGeom>
-          <a:noFill/>
-        </p:spPr>
-        <p:txBody>
-          <a:bodyPr wrap="square">
-            <a:spAutoFit/>
-          </a:bodyPr>
-          <a:lstStyle/>
-          <a:p>
-            <a:r>
-              <a:rPr sz="1800" b="0">
-                <a:solidFill>
-                  <a:srgbClr val="1E1E1E"/>
-                </a:solidFill>
-                <a:latin typeface="Arial"/>
-              </a:rPr>
-              <a:t/>
-            </a:r>
           </a:p>
         </p:txBody>
       </p:sp>
@@ -3577,7 +3515,7 @@
             <a:avLst/>
           </a:prstGeom>
           <a:solidFill>
-            <a:srgbClr val="FAFAFC"/>
+            <a:srgbClr val="F5F5F5"/>
           </a:solidFill>
           <a:ln>
             <a:noFill/>
@@ -3607,24 +3545,25 @@
       </p:sp>
       <p:sp>
         <p:nvSpPr>
-          <p:cNvPr id="3" name="Rectangle 2"/>
+          <p:cNvPr id="3" name="Rounded Rectangle 2"/>
           <p:cNvSpPr/>
           <p:nvPr/>
         </p:nvSpPr>
         <p:spPr>
           <a:xfrm>
-            <a:off x="0" y="0"/>
-            <a:ext cx="274320" cy="6858000"/>
-          </a:xfrm>
-          <a:prstGeom prst="rect">
+            <a:off x="914400" y="1371600"/>
+            <a:ext cx="10362895" cy="4572000"/>
+          </a:xfrm>
+          <a:prstGeom prst="roundRect">
             <a:avLst/>
           </a:prstGeom>
           <a:solidFill>
-            <a:srgbClr val="FF6B35"/>
+            <a:srgbClr val="EBEBEB"/>
           </a:solidFill>
           <a:ln>
             <a:noFill/>
           </a:ln>
+          <a:effectLst/>
         </p:spPr>
         <p:style>
           <a:lnRef idx="1">
@@ -3656,8 +3595,8 @@
         </p:nvSpPr>
         <p:spPr>
           <a:xfrm>
-            <a:off x="731520" y="274320"/>
-            <a:ext cx="10515600" cy="914400"/>
+            <a:off x="914400" y="457200"/>
+            <a:ext cx="10362895" cy="914400"/>
           </a:xfrm>
           <a:prstGeom prst="rect">
             <a:avLst/>
@@ -3671,33 +3610,75 @@
           <a:lstStyle/>
           <a:p>
             <a:r>
-              <a:rPr sz="3600" b="1">
+              <a:rPr sz="4800" b="1">
                 <a:solidFill>
-                  <a:srgbClr val="141832"/>
+                  <a:srgbClr val="333333"/>
                 </a:solidFill>
-                <a:latin typeface="Arial"/>
+                <a:latin typeface="Google Sans"/>
               </a:rPr>
-              <a:t/>
-            </a:r>
-          </a:p>
-        </p:txBody>
-      </p:sp>
-      <p:sp>
-        <p:nvSpPr>
-          <p:cNvPr id="5" name="Rectangle 4"/>
+              <a:t>Конкуренция</a:t>
+            </a:r>
+          </a:p>
+        </p:txBody>
+      </p:sp>
+      <p:sp>
+        <p:nvSpPr>
+          <p:cNvPr id="5" name="TextBox 4"/>
+          <p:cNvSpPr txBox="1"/>
+          <p:nvPr/>
+        </p:nvSpPr>
+        <p:spPr>
+          <a:xfrm>
+            <a:off x="1188720" y="1645920"/>
+            <a:ext cx="9814255" cy="4023360"/>
+          </a:xfrm>
+          <a:prstGeom prst="rect">
+            <a:avLst/>
+          </a:prstGeom>
+          <a:noFill/>
+        </p:spPr>
+        <p:txBody>
+          <a:bodyPr wrap="square">
+            <a:spAutoFit/>
+          </a:bodyPr>
+          <a:lstStyle/>
+          <a:p>
+            <a:r>
+              <a:rPr sz="2400" b="0">
+                <a:solidFill>
+                  <a:srgbClr val="333333"/>
+                </a:solidFill>
+                <a:latin typeface="Google Sans"/>
+              </a:rPr>
+              <a:t>Прямые конкуренты: конструкторы сайтов (Tilda, Wix).</a:t>
+            </a:r>
+            <a:br/>
+            <a:r>
+              <a:t>Косвенные: веб-студии, самописные решения.</a:t>
+            </a:r>
+            <a:br/>
+            <a:r>
+              <a:t>Наше преимущество: отраслевая специфика, низкая цена.</a:t>
+            </a:r>
+          </a:p>
+        </p:txBody>
+      </p:sp>
+      <p:sp>
+        <p:nvSpPr>
+          <p:cNvPr id="6" name="Rectangle 5"/>
           <p:cNvSpPr/>
           <p:nvPr/>
         </p:nvSpPr>
         <p:spPr>
           <a:xfrm>
-            <a:off x="731520" y="1051560"/>
-            <a:ext cx="10515600" cy="27432"/>
+            <a:off x="0" y="914400"/>
+            <a:ext cx="182880" cy="5029200"/>
           </a:xfrm>
           <a:prstGeom prst="rect">
             <a:avLst/>
           </a:prstGeom>
           <a:solidFill>
-            <a:srgbClr val="FF6B35"/>
+            <a:srgbClr val="34BFA3"/>
           </a:solidFill>
           <a:ln>
             <a:noFill/>
@@ -3722,278 +3703,6 @@
           <a:lstStyle/>
           <a:p>
             <a:pPr algn="ctr"/>
-          </a:p>
-        </p:txBody>
-      </p:sp>
-      <p:sp>
-        <p:nvSpPr>
-          <p:cNvPr id="6" name="TextBox 5"/>
-          <p:cNvSpPr txBox="1"/>
-          <p:nvPr/>
-        </p:nvSpPr>
-        <p:spPr>
-          <a:xfrm>
-            <a:off x="731520" y="1371600"/>
-            <a:ext cx="10515600" cy="457200"/>
-          </a:xfrm>
-          <a:prstGeom prst="rect">
-            <a:avLst/>
-          </a:prstGeom>
-          <a:noFill/>
-        </p:spPr>
-        <p:txBody>
-          <a:bodyPr wrap="none">
-            <a:spAutoFit/>
-          </a:bodyPr>
-          <a:lstStyle/>
-          <a:p>
-            <a:r>
-              <a:rPr sz="2400" b="1">
-                <a:solidFill>
-                  <a:srgbClr val="141832"/>
-                </a:solidFill>
-                <a:latin typeface="Arial"/>
-              </a:rPr>
-              <a:t/>
-            </a:r>
-          </a:p>
-        </p:txBody>
-      </p:sp>
-      <p:sp>
-        <p:nvSpPr>
-          <p:cNvPr id="7" name="TextBox 6"/>
-          <p:cNvSpPr txBox="1"/>
-          <p:nvPr/>
-        </p:nvSpPr>
-        <p:spPr>
-          <a:xfrm>
-            <a:off x="731520" y="1920240"/>
-            <a:ext cx="10515600" cy="548640"/>
-          </a:xfrm>
-          <a:prstGeom prst="rect">
-            <a:avLst/>
-          </a:prstGeom>
-          <a:noFill/>
-        </p:spPr>
-        <p:txBody>
-          <a:bodyPr wrap="square">
-            <a:spAutoFit/>
-          </a:bodyPr>
-          <a:lstStyle/>
-          <a:p>
-            <a:r>
-              <a:rPr sz="1800" b="0">
-                <a:solidFill>
-                  <a:srgbClr val="1E1E1E"/>
-                </a:solidFill>
-                <a:latin typeface="Arial"/>
-              </a:rPr>
-              <a:t/>
-            </a:r>
-          </a:p>
-        </p:txBody>
-      </p:sp>
-      <p:sp>
-        <p:nvSpPr>
-          <p:cNvPr id="8" name="TextBox 7"/>
-          <p:cNvSpPr txBox="1"/>
-          <p:nvPr/>
-        </p:nvSpPr>
-        <p:spPr>
-          <a:xfrm>
-            <a:off x="731520" y="2423160"/>
-            <a:ext cx="10515600" cy="457200"/>
-          </a:xfrm>
-          <a:prstGeom prst="rect">
-            <a:avLst/>
-          </a:prstGeom>
-          <a:noFill/>
-        </p:spPr>
-        <p:txBody>
-          <a:bodyPr wrap="none">
-            <a:spAutoFit/>
-          </a:bodyPr>
-          <a:lstStyle/>
-          <a:p>
-            <a:r>
-              <a:rPr sz="2400" b="1">
-                <a:solidFill>
-                  <a:srgbClr val="141832"/>
-                </a:solidFill>
-                <a:latin typeface="Arial"/>
-              </a:rPr>
-              <a:t/>
-            </a:r>
-          </a:p>
-        </p:txBody>
-      </p:sp>
-      <p:sp>
-        <p:nvSpPr>
-          <p:cNvPr id="9" name="TextBox 8"/>
-          <p:cNvSpPr txBox="1"/>
-          <p:nvPr/>
-        </p:nvSpPr>
-        <p:spPr>
-          <a:xfrm>
-            <a:off x="731520" y="2971800"/>
-            <a:ext cx="10515600" cy="548640"/>
-          </a:xfrm>
-          <a:prstGeom prst="rect">
-            <a:avLst/>
-          </a:prstGeom>
-          <a:noFill/>
-        </p:spPr>
-        <p:txBody>
-          <a:bodyPr wrap="square">
-            <a:spAutoFit/>
-          </a:bodyPr>
-          <a:lstStyle/>
-          <a:p>
-            <a:r>
-              <a:rPr sz="1800" b="0">
-                <a:solidFill>
-                  <a:srgbClr val="1E1E1E"/>
-                </a:solidFill>
-                <a:latin typeface="Arial"/>
-              </a:rPr>
-              <a:t/>
-            </a:r>
-          </a:p>
-        </p:txBody>
-      </p:sp>
-      <p:sp>
-        <p:nvSpPr>
-          <p:cNvPr id="10" name="TextBox 9"/>
-          <p:cNvSpPr txBox="1"/>
-          <p:nvPr/>
-        </p:nvSpPr>
-        <p:spPr>
-          <a:xfrm>
-            <a:off x="731520" y="3474720"/>
-            <a:ext cx="10515600" cy="457200"/>
-          </a:xfrm>
-          <a:prstGeom prst="rect">
-            <a:avLst/>
-          </a:prstGeom>
-          <a:noFill/>
-        </p:spPr>
-        <p:txBody>
-          <a:bodyPr wrap="none">
-            <a:spAutoFit/>
-          </a:bodyPr>
-          <a:lstStyle/>
-          <a:p>
-            <a:r>
-              <a:rPr sz="2400" b="1">
-                <a:solidFill>
-                  <a:srgbClr val="141832"/>
-                </a:solidFill>
-                <a:latin typeface="Arial"/>
-              </a:rPr>
-              <a:t/>
-            </a:r>
-          </a:p>
-        </p:txBody>
-      </p:sp>
-      <p:sp>
-        <p:nvSpPr>
-          <p:cNvPr id="11" name="TextBox 10"/>
-          <p:cNvSpPr txBox="1"/>
-          <p:nvPr/>
-        </p:nvSpPr>
-        <p:spPr>
-          <a:xfrm>
-            <a:off x="731520" y="4023360"/>
-            <a:ext cx="10515600" cy="548640"/>
-          </a:xfrm>
-          <a:prstGeom prst="rect">
-            <a:avLst/>
-          </a:prstGeom>
-          <a:noFill/>
-        </p:spPr>
-        <p:txBody>
-          <a:bodyPr wrap="square">
-            <a:spAutoFit/>
-          </a:bodyPr>
-          <a:lstStyle/>
-          <a:p>
-            <a:r>
-              <a:rPr sz="1800" b="0">
-                <a:solidFill>
-                  <a:srgbClr val="1E1E1E"/>
-                </a:solidFill>
-                <a:latin typeface="Arial"/>
-              </a:rPr>
-              <a:t/>
-            </a:r>
-          </a:p>
-        </p:txBody>
-      </p:sp>
-      <p:sp>
-        <p:nvSpPr>
-          <p:cNvPr id="12" name="TextBox 11"/>
-          <p:cNvSpPr txBox="1"/>
-          <p:nvPr/>
-        </p:nvSpPr>
-        <p:spPr>
-          <a:xfrm>
-            <a:off x="731520" y="4526280"/>
-            <a:ext cx="10515600" cy="457200"/>
-          </a:xfrm>
-          <a:prstGeom prst="rect">
-            <a:avLst/>
-          </a:prstGeom>
-          <a:noFill/>
-        </p:spPr>
-        <p:txBody>
-          <a:bodyPr wrap="none">
-            <a:spAutoFit/>
-          </a:bodyPr>
-          <a:lstStyle/>
-          <a:p>
-            <a:r>
-              <a:rPr sz="2400" b="1">
-                <a:solidFill>
-                  <a:srgbClr val="141832"/>
-                </a:solidFill>
-                <a:latin typeface="Arial"/>
-              </a:rPr>
-              <a:t/>
-            </a:r>
-          </a:p>
-        </p:txBody>
-      </p:sp>
-      <p:sp>
-        <p:nvSpPr>
-          <p:cNvPr id="13" name="TextBox 12"/>
-          <p:cNvSpPr txBox="1"/>
-          <p:nvPr/>
-        </p:nvSpPr>
-        <p:spPr>
-          <a:xfrm>
-            <a:off x="731520" y="5074920"/>
-            <a:ext cx="10515600" cy="548640"/>
-          </a:xfrm>
-          <a:prstGeom prst="rect">
-            <a:avLst/>
-          </a:prstGeom>
-          <a:noFill/>
-        </p:spPr>
-        <p:txBody>
-          <a:bodyPr wrap="square">
-            <a:spAutoFit/>
-          </a:bodyPr>
-          <a:lstStyle/>
-          <a:p>
-            <a:r>
-              <a:rPr sz="1800" b="0">
-                <a:solidFill>
-                  <a:srgbClr val="1E1E1E"/>
-                </a:solidFill>
-                <a:latin typeface="Arial"/>
-              </a:rPr>
-              <a:t/>
-            </a:r>
           </a:p>
         </p:txBody>
       </p:sp>
@@ -4030,7 +3739,7 @@
             <a:avLst/>
           </a:prstGeom>
           <a:solidFill>
-            <a:srgbClr val="FAFAFC"/>
+            <a:srgbClr val="F5F5F5"/>
           </a:solidFill>
           <a:ln>
             <a:noFill/>
@@ -4060,24 +3769,25 @@
       </p:sp>
       <p:sp>
         <p:nvSpPr>
-          <p:cNvPr id="3" name="Rectangle 2"/>
+          <p:cNvPr id="3" name="Rounded Rectangle 2"/>
           <p:cNvSpPr/>
           <p:nvPr/>
         </p:nvSpPr>
         <p:spPr>
           <a:xfrm>
-            <a:off x="0" y="0"/>
-            <a:ext cx="274320" cy="6858000"/>
-          </a:xfrm>
-          <a:prstGeom prst="rect">
+            <a:off x="914400" y="1371600"/>
+            <a:ext cx="10362895" cy="4572000"/>
+          </a:xfrm>
+          <a:prstGeom prst="roundRect">
             <a:avLst/>
           </a:prstGeom>
           <a:solidFill>
-            <a:srgbClr val="FF6B35"/>
+            <a:srgbClr val="EBEBEB"/>
           </a:solidFill>
           <a:ln>
             <a:noFill/>
           </a:ln>
+          <a:effectLst/>
         </p:spPr>
         <p:style>
           <a:lnRef idx="1">
@@ -4109,8 +3819,8 @@
         </p:nvSpPr>
         <p:spPr>
           <a:xfrm>
-            <a:off x="731520" y="274320"/>
-            <a:ext cx="10515600" cy="914400"/>
+            <a:off x="914400" y="457200"/>
+            <a:ext cx="10362895" cy="914400"/>
           </a:xfrm>
           <a:prstGeom prst="rect">
             <a:avLst/>
@@ -4124,33 +3834,75 @@
           <a:lstStyle/>
           <a:p>
             <a:r>
-              <a:rPr sz="3600" b="1">
+              <a:rPr sz="4800" b="1">
                 <a:solidFill>
-                  <a:srgbClr val="141832"/>
+                  <a:srgbClr val="333333"/>
                 </a:solidFill>
-                <a:latin typeface="Arial"/>
+                <a:latin typeface="Google Sans"/>
               </a:rPr>
-              <a:t/>
-            </a:r>
-          </a:p>
-        </p:txBody>
-      </p:sp>
-      <p:sp>
-        <p:nvSpPr>
-          <p:cNvPr id="5" name="Rectangle 4"/>
+              <a:t>Текущие результаты</a:t>
+            </a:r>
+          </a:p>
+        </p:txBody>
+      </p:sp>
+      <p:sp>
+        <p:nvSpPr>
+          <p:cNvPr id="5" name="TextBox 4"/>
+          <p:cNvSpPr txBox="1"/>
+          <p:nvPr/>
+        </p:nvSpPr>
+        <p:spPr>
+          <a:xfrm>
+            <a:off x="1188720" y="1645920"/>
+            <a:ext cx="9814255" cy="4023360"/>
+          </a:xfrm>
+          <a:prstGeom prst="rect">
+            <a:avLst/>
+          </a:prstGeom>
+          <a:noFill/>
+        </p:spPr>
+        <p:txBody>
+          <a:bodyPr wrap="square">
+            <a:spAutoFit/>
+          </a:bodyPr>
+          <a:lstStyle/>
+          <a:p>
+            <a:r>
+              <a:rPr sz="2400" b="0">
+                <a:solidFill>
+                  <a:srgbClr val="333333"/>
+                </a:solidFill>
+                <a:latin typeface="Google Sans"/>
+              </a:rPr>
+              <a:t>Прототип платформы готов.</a:t>
+            </a:r>
+            <a:br/>
+            <a:r>
+              <a:t>Проведено 11 интервью с потенциальными клиентами.</a:t>
+            </a:r>
+            <a:br/>
+            <a:r>
+              <a:t>Подтвержден интерес к продукту.</a:t>
+            </a:r>
+          </a:p>
+        </p:txBody>
+      </p:sp>
+      <p:sp>
+        <p:nvSpPr>
+          <p:cNvPr id="6" name="Rectangle 5"/>
           <p:cNvSpPr/>
           <p:nvPr/>
         </p:nvSpPr>
         <p:spPr>
           <a:xfrm>
-            <a:off x="731520" y="1051560"/>
-            <a:ext cx="10515600" cy="27432"/>
+            <a:off x="0" y="914400"/>
+            <a:ext cx="182880" cy="5029200"/>
           </a:xfrm>
           <a:prstGeom prst="rect">
             <a:avLst/>
           </a:prstGeom>
           <a:solidFill>
-            <a:srgbClr val="FF6B35"/>
+            <a:srgbClr val="34BFA3"/>
           </a:solidFill>
           <a:ln>
             <a:noFill/>
@@ -4175,312 +3927,6 @@
           <a:lstStyle/>
           <a:p>
             <a:pPr algn="ctr"/>
-          </a:p>
-        </p:txBody>
-      </p:sp>
-      <p:sp>
-        <p:nvSpPr>
-          <p:cNvPr id="6" name="TextBox 5"/>
-          <p:cNvSpPr txBox="1"/>
-          <p:nvPr/>
-        </p:nvSpPr>
-        <p:spPr>
-          <a:xfrm>
-            <a:off x="731520" y="1371600"/>
-            <a:ext cx="10515600" cy="457200"/>
-          </a:xfrm>
-          <a:prstGeom prst="rect">
-            <a:avLst/>
-          </a:prstGeom>
-          <a:noFill/>
-        </p:spPr>
-        <p:txBody>
-          <a:bodyPr wrap="none">
-            <a:spAutoFit/>
-          </a:bodyPr>
-          <a:lstStyle/>
-          <a:p>
-            <a:r>
-              <a:rPr sz="2400" b="1">
-                <a:solidFill>
-                  <a:srgbClr val="141832"/>
-                </a:solidFill>
-                <a:latin typeface="Arial"/>
-              </a:rPr>
-              <a:t/>
-            </a:r>
-          </a:p>
-        </p:txBody>
-      </p:sp>
-      <p:sp>
-        <p:nvSpPr>
-          <p:cNvPr id="7" name="TextBox 6"/>
-          <p:cNvSpPr txBox="1"/>
-          <p:nvPr/>
-        </p:nvSpPr>
-        <p:spPr>
-          <a:xfrm>
-            <a:off x="731520" y="1920240"/>
-            <a:ext cx="10515600" cy="548640"/>
-          </a:xfrm>
-          <a:prstGeom prst="rect">
-            <a:avLst/>
-          </a:prstGeom>
-          <a:noFill/>
-        </p:spPr>
-        <p:txBody>
-          <a:bodyPr wrap="square">
-            <a:spAutoFit/>
-          </a:bodyPr>
-          <a:lstStyle/>
-          <a:p>
-            <a:r>
-              <a:rPr sz="1800" b="0">
-                <a:solidFill>
-                  <a:srgbClr val="1E1E1E"/>
-                </a:solidFill>
-                <a:latin typeface="Arial"/>
-              </a:rPr>
-              <a:t/>
-            </a:r>
-          </a:p>
-        </p:txBody>
-      </p:sp>
-      <p:sp>
-        <p:nvSpPr>
-          <p:cNvPr id="8" name="TextBox 7"/>
-          <p:cNvSpPr txBox="1"/>
-          <p:nvPr/>
-        </p:nvSpPr>
-        <p:spPr>
-          <a:xfrm>
-            <a:off x="731520" y="2423160"/>
-            <a:ext cx="10515600" cy="457200"/>
-          </a:xfrm>
-          <a:prstGeom prst="rect">
-            <a:avLst/>
-          </a:prstGeom>
-          <a:noFill/>
-        </p:spPr>
-        <p:txBody>
-          <a:bodyPr wrap="none">
-            <a:spAutoFit/>
-          </a:bodyPr>
-          <a:lstStyle/>
-          <a:p>
-            <a:r>
-              <a:rPr sz="2400" b="1">
-                <a:solidFill>
-                  <a:srgbClr val="141832"/>
-                </a:solidFill>
-                <a:latin typeface="Arial"/>
-              </a:rPr>
-              <a:t/>
-            </a:r>
-          </a:p>
-        </p:txBody>
-      </p:sp>
-      <p:sp>
-        <p:nvSpPr>
-          <p:cNvPr id="9" name="TextBox 8"/>
-          <p:cNvSpPr txBox="1"/>
-          <p:nvPr/>
-        </p:nvSpPr>
-        <p:spPr>
-          <a:xfrm>
-            <a:off x="731520" y="2971800"/>
-            <a:ext cx="10515600" cy="548640"/>
-          </a:xfrm>
-          <a:prstGeom prst="rect">
-            <a:avLst/>
-          </a:prstGeom>
-          <a:noFill/>
-        </p:spPr>
-        <p:txBody>
-          <a:bodyPr wrap="square">
-            <a:spAutoFit/>
-          </a:bodyPr>
-          <a:lstStyle/>
-          <a:p>
-            <a:r>
-              <a:rPr sz="1800" b="0">
-                <a:solidFill>
-                  <a:srgbClr val="1E1E1E"/>
-                </a:solidFill>
-                <a:latin typeface="Arial"/>
-              </a:rPr>
-              <a:t/>
-            </a:r>
-          </a:p>
-        </p:txBody>
-      </p:sp>
-      <p:sp>
-        <p:nvSpPr>
-          <p:cNvPr id="10" name="TextBox 9"/>
-          <p:cNvSpPr txBox="1"/>
-          <p:nvPr/>
-        </p:nvSpPr>
-        <p:spPr>
-          <a:xfrm>
-            <a:off x="731520" y="3474720"/>
-            <a:ext cx="10515600" cy="457200"/>
-          </a:xfrm>
-          <a:prstGeom prst="rect">
-            <a:avLst/>
-          </a:prstGeom>
-          <a:noFill/>
-        </p:spPr>
-        <p:txBody>
-          <a:bodyPr wrap="none">
-            <a:spAutoFit/>
-          </a:bodyPr>
-          <a:lstStyle/>
-          <a:p>
-            <a:r>
-              <a:rPr sz="2400" b="1">
-                <a:solidFill>
-                  <a:srgbClr val="141832"/>
-                </a:solidFill>
-                <a:latin typeface="Arial"/>
-              </a:rPr>
-              <a:t/>
-            </a:r>
-          </a:p>
-        </p:txBody>
-      </p:sp>
-      <p:sp>
-        <p:nvSpPr>
-          <p:cNvPr id="11" name="TextBox 10"/>
-          <p:cNvSpPr txBox="1"/>
-          <p:nvPr/>
-        </p:nvSpPr>
-        <p:spPr>
-          <a:xfrm>
-            <a:off x="731520" y="4023360"/>
-            <a:ext cx="10515600" cy="548640"/>
-          </a:xfrm>
-          <a:prstGeom prst="rect">
-            <a:avLst/>
-          </a:prstGeom>
-          <a:noFill/>
-        </p:spPr>
-        <p:txBody>
-          <a:bodyPr wrap="square">
-            <a:spAutoFit/>
-          </a:bodyPr>
-          <a:lstStyle/>
-          <a:p>
-            <a:r>
-              <a:rPr sz="1800" b="0">
-                <a:solidFill>
-                  <a:srgbClr val="1E1E1E"/>
-                </a:solidFill>
-                <a:latin typeface="Arial"/>
-              </a:rPr>
-              <a:t/>
-            </a:r>
-          </a:p>
-        </p:txBody>
-      </p:sp>
-      <p:sp>
-        <p:nvSpPr>
-          <p:cNvPr id="12" name="TextBox 11"/>
-          <p:cNvSpPr txBox="1"/>
-          <p:nvPr/>
-        </p:nvSpPr>
-        <p:spPr>
-          <a:xfrm>
-            <a:off x="731520" y="4526280"/>
-            <a:ext cx="10515600" cy="457200"/>
-          </a:xfrm>
-          <a:prstGeom prst="rect">
-            <a:avLst/>
-          </a:prstGeom>
-          <a:noFill/>
-        </p:spPr>
-        <p:txBody>
-          <a:bodyPr wrap="none">
-            <a:spAutoFit/>
-          </a:bodyPr>
-          <a:lstStyle/>
-          <a:p>
-            <a:r>
-              <a:rPr sz="2400" b="1">
-                <a:solidFill>
-                  <a:srgbClr val="141832"/>
-                </a:solidFill>
-                <a:latin typeface="Arial"/>
-              </a:rPr>
-              <a:t/>
-            </a:r>
-          </a:p>
-        </p:txBody>
-      </p:sp>
-      <p:sp>
-        <p:nvSpPr>
-          <p:cNvPr id="13" name="TextBox 12"/>
-          <p:cNvSpPr txBox="1"/>
-          <p:nvPr/>
-        </p:nvSpPr>
-        <p:spPr>
-          <a:xfrm>
-            <a:off x="731520" y="5074920"/>
-            <a:ext cx="10515600" cy="548640"/>
-          </a:xfrm>
-          <a:prstGeom prst="rect">
-            <a:avLst/>
-          </a:prstGeom>
-          <a:noFill/>
-        </p:spPr>
-        <p:txBody>
-          <a:bodyPr wrap="square">
-            <a:spAutoFit/>
-          </a:bodyPr>
-          <a:lstStyle/>
-          <a:p>
-            <a:r>
-              <a:rPr sz="1800" b="0">
-                <a:solidFill>
-                  <a:srgbClr val="1E1E1E"/>
-                </a:solidFill>
-                <a:latin typeface="Arial"/>
-              </a:rPr>
-              <a:t/>
-            </a:r>
-          </a:p>
-        </p:txBody>
-      </p:sp>
-      <p:sp>
-        <p:nvSpPr>
-          <p:cNvPr id="14" name="TextBox 13"/>
-          <p:cNvSpPr txBox="1"/>
-          <p:nvPr/>
-        </p:nvSpPr>
-        <p:spPr>
-          <a:xfrm>
-            <a:off x="731520" y="5577840"/>
-            <a:ext cx="10515600" cy="548640"/>
-          </a:xfrm>
-          <a:prstGeom prst="rect">
-            <a:avLst/>
-          </a:prstGeom>
-          <a:noFill/>
-        </p:spPr>
-        <p:txBody>
-          <a:bodyPr wrap="square">
-            <a:spAutoFit/>
-          </a:bodyPr>
-          <a:lstStyle/>
-          <a:p>
-            <a:r>
-              <a:rPr sz="1800" b="0">
-                <a:solidFill>
-                  <a:srgbClr val="1E1E1E"/>
-                </a:solidFill>
-                <a:latin typeface="Arial"/>
-              </a:rPr>
-              <a:t/>
-            </a:r>
           </a:p>
         </p:txBody>
       </p:sp>
@@ -4517,7 +3963,7 @@
             <a:avLst/>
           </a:prstGeom>
           <a:solidFill>
-            <a:srgbClr val="FAFAFC"/>
+            <a:srgbClr val="F5F5F5"/>
           </a:solidFill>
           <a:ln>
             <a:noFill/>
@@ -4547,24 +3993,25 @@
       </p:sp>
       <p:sp>
         <p:nvSpPr>
-          <p:cNvPr id="3" name="Rectangle 2"/>
+          <p:cNvPr id="3" name="Rounded Rectangle 2"/>
           <p:cNvSpPr/>
           <p:nvPr/>
         </p:nvSpPr>
         <p:spPr>
           <a:xfrm>
-            <a:off x="0" y="0"/>
-            <a:ext cx="274320" cy="6858000"/>
-          </a:xfrm>
-          <a:prstGeom prst="rect">
+            <a:off x="914400" y="1371600"/>
+            <a:ext cx="10362895" cy="4572000"/>
+          </a:xfrm>
+          <a:prstGeom prst="roundRect">
             <a:avLst/>
           </a:prstGeom>
           <a:solidFill>
-            <a:srgbClr val="FF6B35"/>
+            <a:srgbClr val="EBEBEB"/>
           </a:solidFill>
           <a:ln>
             <a:noFill/>
           </a:ln>
+          <a:effectLst/>
         </p:spPr>
         <p:style>
           <a:lnRef idx="1">
@@ -4596,8 +4043,8 @@
         </p:nvSpPr>
         <p:spPr>
           <a:xfrm>
-            <a:off x="731520" y="274320"/>
-            <a:ext cx="10515600" cy="914400"/>
+            <a:off x="914400" y="457200"/>
+            <a:ext cx="10362895" cy="914400"/>
           </a:xfrm>
           <a:prstGeom prst="rect">
             <a:avLst/>
@@ -4611,33 +4058,75 @@
           <a:lstStyle/>
           <a:p>
             <a:r>
-              <a:rPr sz="3600" b="1">
+              <a:rPr sz="4800" b="1">
                 <a:solidFill>
-                  <a:srgbClr val="141832"/>
+                  <a:srgbClr val="333333"/>
                 </a:solidFill>
-                <a:latin typeface="Arial"/>
+                <a:latin typeface="Google Sans"/>
               </a:rPr>
-              <a:t/>
-            </a:r>
-          </a:p>
-        </p:txBody>
-      </p:sp>
-      <p:sp>
-        <p:nvSpPr>
-          <p:cNvPr id="5" name="Rectangle 4"/>
+              <a:t>Стратегия развития</a:t>
+            </a:r>
+          </a:p>
+        </p:txBody>
+      </p:sp>
+      <p:sp>
+        <p:nvSpPr>
+          <p:cNvPr id="5" name="TextBox 4"/>
+          <p:cNvSpPr txBox="1"/>
+          <p:nvPr/>
+        </p:nvSpPr>
+        <p:spPr>
+          <a:xfrm>
+            <a:off x="1188720" y="1645920"/>
+            <a:ext cx="9814255" cy="4023360"/>
+          </a:xfrm>
+          <a:prstGeom prst="rect">
+            <a:avLst/>
+          </a:prstGeom>
+          <a:noFill/>
+        </p:spPr>
+        <p:txBody>
+          <a:bodyPr wrap="square">
+            <a:spAutoFit/>
+          </a:bodyPr>
+          <a:lstStyle/>
+          <a:p>
+            <a:r>
+              <a:rPr sz="2400" b="0">
+                <a:solidFill>
+                  <a:srgbClr val="333333"/>
+                </a:solidFill>
+                <a:latin typeface="Google Sans"/>
+              </a:rPr>
+              <a:t>2024: запуск пилота в 3 регионах.</a:t>
+            </a:r>
+            <a:br/>
+            <a:r>
+              <a:t>2025: масштабирование на 10 регионов.</a:t>
+            </a:r>
+            <a:br/>
+            <a:r>
+              <a:t>2026: выход на самоокупаемость.</a:t>
+            </a:r>
+          </a:p>
+        </p:txBody>
+      </p:sp>
+      <p:sp>
+        <p:nvSpPr>
+          <p:cNvPr id="6" name="Rectangle 5"/>
           <p:cNvSpPr/>
           <p:nvPr/>
         </p:nvSpPr>
         <p:spPr>
           <a:xfrm>
-            <a:off x="731520" y="1051560"/>
-            <a:ext cx="10515600" cy="27432"/>
+            <a:off x="0" y="914400"/>
+            <a:ext cx="182880" cy="5029200"/>
           </a:xfrm>
           <a:prstGeom prst="rect">
             <a:avLst/>
           </a:prstGeom>
           <a:solidFill>
-            <a:srgbClr val="FF6B35"/>
+            <a:srgbClr val="34BFA3"/>
           </a:solidFill>
           <a:ln>
             <a:noFill/>
@@ -4662,40 +4151,6 @@
           <a:lstStyle/>
           <a:p>
             <a:pPr algn="ctr"/>
-          </a:p>
-        </p:txBody>
-      </p:sp>
-      <p:sp>
-        <p:nvSpPr>
-          <p:cNvPr id="6" name="TextBox 5"/>
-          <p:cNvSpPr txBox="1"/>
-          <p:nvPr/>
-        </p:nvSpPr>
-        <p:spPr>
-          <a:xfrm>
-            <a:off x="731520" y="1371600"/>
-            <a:ext cx="10515600" cy="548640"/>
-          </a:xfrm>
-          <a:prstGeom prst="rect">
-            <a:avLst/>
-          </a:prstGeom>
-          <a:noFill/>
-        </p:spPr>
-        <p:txBody>
-          <a:bodyPr wrap="square">
-            <a:spAutoFit/>
-          </a:bodyPr>
-          <a:lstStyle/>
-          <a:p>
-            <a:r>
-              <a:rPr sz="1800" b="0">
-                <a:solidFill>
-                  <a:srgbClr val="1E1E1E"/>
-                </a:solidFill>
-                <a:latin typeface="Arial"/>
-              </a:rPr>
-              <a:t/>
-            </a:r>
           </a:p>
         </p:txBody>
       </p:sp>
@@ -4732,7 +4187,7 @@
             <a:avLst/>
           </a:prstGeom>
           <a:solidFill>
-            <a:srgbClr val="FAFAFC"/>
+            <a:srgbClr val="F5F5F5"/>
           </a:solidFill>
           <a:ln>
             <a:noFill/>
@@ -4762,24 +4217,25 @@
       </p:sp>
       <p:sp>
         <p:nvSpPr>
-          <p:cNvPr id="3" name="Rectangle 2"/>
+          <p:cNvPr id="3" name="Rounded Rectangle 2"/>
           <p:cNvSpPr/>
           <p:nvPr/>
         </p:nvSpPr>
         <p:spPr>
           <a:xfrm>
-            <a:off x="0" y="0"/>
-            <a:ext cx="274320" cy="6858000"/>
-          </a:xfrm>
-          <a:prstGeom prst="rect">
+            <a:off x="914400" y="1371600"/>
+            <a:ext cx="10362895" cy="4572000"/>
+          </a:xfrm>
+          <a:prstGeom prst="roundRect">
             <a:avLst/>
           </a:prstGeom>
           <a:solidFill>
-            <a:srgbClr val="FF6B35"/>
+            <a:srgbClr val="EBEBEB"/>
           </a:solidFill>
           <a:ln>
             <a:noFill/>
           </a:ln>
+          <a:effectLst/>
         </p:spPr>
         <p:style>
           <a:lnRef idx="1">
@@ -4811,8 +4267,8 @@
         </p:nvSpPr>
         <p:spPr>
           <a:xfrm>
-            <a:off x="731520" y="274320"/>
-            <a:ext cx="10515600" cy="914400"/>
+            <a:off x="914400" y="457200"/>
+            <a:ext cx="10362895" cy="914400"/>
           </a:xfrm>
           <a:prstGeom prst="rect">
             <a:avLst/>
@@ -4826,33 +4282,75 @@
           <a:lstStyle/>
           <a:p>
             <a:r>
-              <a:rPr sz="3600" b="1">
+              <a:rPr sz="4800" b="1">
                 <a:solidFill>
-                  <a:srgbClr val="141832"/>
+                  <a:srgbClr val="333333"/>
                 </a:solidFill>
-                <a:latin typeface="Arial"/>
+                <a:latin typeface="Google Sans"/>
               </a:rPr>
-              <a:t/>
-            </a:r>
-          </a:p>
-        </p:txBody>
-      </p:sp>
-      <p:sp>
-        <p:nvSpPr>
-          <p:cNvPr id="5" name="Rectangle 4"/>
+              <a:t>Финансовый прогноз</a:t>
+            </a:r>
+          </a:p>
+        </p:txBody>
+      </p:sp>
+      <p:sp>
+        <p:nvSpPr>
+          <p:cNvPr id="5" name="TextBox 4"/>
+          <p:cNvSpPr txBox="1"/>
+          <p:nvPr/>
+        </p:nvSpPr>
+        <p:spPr>
+          <a:xfrm>
+            <a:off x="1188720" y="1645920"/>
+            <a:ext cx="9814255" cy="4023360"/>
+          </a:xfrm>
+          <a:prstGeom prst="rect">
+            <a:avLst/>
+          </a:prstGeom>
+          <a:noFill/>
+        </p:spPr>
+        <p:txBody>
+          <a:bodyPr wrap="square">
+            <a:spAutoFit/>
+          </a:bodyPr>
+          <a:lstStyle/>
+          <a:p>
+            <a:r>
+              <a:rPr sz="2400" b="0">
+                <a:solidFill>
+                  <a:srgbClr val="333333"/>
+                </a:solidFill>
+                <a:latin typeface="Google Sans"/>
+              </a:rPr>
+              <a:t>Год 1: выручка 2 млн руб., убыток 1 млн.</a:t>
+            </a:r>
+            <a:br/>
+            <a:r>
+              <a:t>Год 2: выручка 8 млн руб., прибыль 2 млн.</a:t>
+            </a:r>
+            <a:br/>
+            <a:r>
+              <a:t>Год 3: выручка 20 млн руб., прибыль 8 млн.</a:t>
+            </a:r>
+          </a:p>
+        </p:txBody>
+      </p:sp>
+      <p:sp>
+        <p:nvSpPr>
+          <p:cNvPr id="6" name="Rectangle 5"/>
           <p:cNvSpPr/>
           <p:nvPr/>
         </p:nvSpPr>
         <p:spPr>
           <a:xfrm>
-            <a:off x="731520" y="1051560"/>
-            <a:ext cx="10515600" cy="27432"/>
+            <a:off x="0" y="914400"/>
+            <a:ext cx="182880" cy="5029200"/>
           </a:xfrm>
           <a:prstGeom prst="rect">
             <a:avLst/>
           </a:prstGeom>
           <a:solidFill>
-            <a:srgbClr val="FF6B35"/>
+            <a:srgbClr val="34BFA3"/>
           </a:solidFill>
           <a:ln>
             <a:noFill/>
@@ -4877,210 +4375,6 @@
           <a:lstStyle/>
           <a:p>
             <a:pPr algn="ctr"/>
-          </a:p>
-        </p:txBody>
-      </p:sp>
-      <p:sp>
-        <p:nvSpPr>
-          <p:cNvPr id="6" name="TextBox 5"/>
-          <p:cNvSpPr txBox="1"/>
-          <p:nvPr/>
-        </p:nvSpPr>
-        <p:spPr>
-          <a:xfrm>
-            <a:off x="731520" y="1371600"/>
-            <a:ext cx="10515600" cy="457200"/>
-          </a:xfrm>
-          <a:prstGeom prst="rect">
-            <a:avLst/>
-          </a:prstGeom>
-          <a:noFill/>
-        </p:spPr>
-        <p:txBody>
-          <a:bodyPr wrap="none">
-            <a:spAutoFit/>
-          </a:bodyPr>
-          <a:lstStyle/>
-          <a:p>
-            <a:r>
-              <a:rPr sz="2400" b="1">
-                <a:solidFill>
-                  <a:srgbClr val="141832"/>
-                </a:solidFill>
-                <a:latin typeface="Arial"/>
-              </a:rPr>
-              <a:t/>
-            </a:r>
-          </a:p>
-        </p:txBody>
-      </p:sp>
-      <p:sp>
-        <p:nvSpPr>
-          <p:cNvPr id="7" name="TextBox 6"/>
-          <p:cNvSpPr txBox="1"/>
-          <p:nvPr/>
-        </p:nvSpPr>
-        <p:spPr>
-          <a:xfrm>
-            <a:off x="731520" y="1920240"/>
-            <a:ext cx="10515600" cy="457200"/>
-          </a:xfrm>
-          <a:prstGeom prst="rect">
-            <a:avLst/>
-          </a:prstGeom>
-          <a:noFill/>
-        </p:spPr>
-        <p:txBody>
-          <a:bodyPr wrap="none">
-            <a:spAutoFit/>
-          </a:bodyPr>
-          <a:lstStyle/>
-          <a:p>
-            <a:r>
-              <a:rPr sz="2400" b="1">
-                <a:solidFill>
-                  <a:srgbClr val="141832"/>
-                </a:solidFill>
-                <a:latin typeface="Arial"/>
-              </a:rPr>
-              <a:t/>
-            </a:r>
-          </a:p>
-        </p:txBody>
-      </p:sp>
-      <p:sp>
-        <p:nvSpPr>
-          <p:cNvPr id="8" name="TextBox 7"/>
-          <p:cNvSpPr txBox="1"/>
-          <p:nvPr/>
-        </p:nvSpPr>
-        <p:spPr>
-          <a:xfrm>
-            <a:off x="731520" y="2468880"/>
-            <a:ext cx="10515600" cy="457200"/>
-          </a:xfrm>
-          <a:prstGeom prst="rect">
-            <a:avLst/>
-          </a:prstGeom>
-          <a:noFill/>
-        </p:spPr>
-        <p:txBody>
-          <a:bodyPr wrap="none">
-            <a:spAutoFit/>
-          </a:bodyPr>
-          <a:lstStyle/>
-          <a:p>
-            <a:r>
-              <a:rPr sz="2400" b="1">
-                <a:solidFill>
-                  <a:srgbClr val="141832"/>
-                </a:solidFill>
-                <a:latin typeface="Arial"/>
-              </a:rPr>
-              <a:t/>
-            </a:r>
-          </a:p>
-        </p:txBody>
-      </p:sp>
-      <p:sp>
-        <p:nvSpPr>
-          <p:cNvPr id="9" name="TextBox 8"/>
-          <p:cNvSpPr txBox="1"/>
-          <p:nvPr/>
-        </p:nvSpPr>
-        <p:spPr>
-          <a:xfrm>
-            <a:off x="731520" y="3017520"/>
-            <a:ext cx="10515600" cy="548640"/>
-          </a:xfrm>
-          <a:prstGeom prst="rect">
-            <a:avLst/>
-          </a:prstGeom>
-          <a:noFill/>
-        </p:spPr>
-        <p:txBody>
-          <a:bodyPr wrap="square">
-            <a:spAutoFit/>
-          </a:bodyPr>
-          <a:lstStyle/>
-          <a:p>
-            <a:r>
-              <a:rPr sz="1800" b="0">
-                <a:solidFill>
-                  <a:srgbClr val="1E1E1E"/>
-                </a:solidFill>
-                <a:latin typeface="Arial"/>
-              </a:rPr>
-              <a:t/>
-            </a:r>
-          </a:p>
-        </p:txBody>
-      </p:sp>
-      <p:sp>
-        <p:nvSpPr>
-          <p:cNvPr id="10" name="TextBox 9"/>
-          <p:cNvSpPr txBox="1"/>
-          <p:nvPr/>
-        </p:nvSpPr>
-        <p:spPr>
-          <a:xfrm>
-            <a:off x="731520" y="3520440"/>
-            <a:ext cx="10515600" cy="457200"/>
-          </a:xfrm>
-          <a:prstGeom prst="rect">
-            <a:avLst/>
-          </a:prstGeom>
-          <a:noFill/>
-        </p:spPr>
-        <p:txBody>
-          <a:bodyPr wrap="none">
-            <a:spAutoFit/>
-          </a:bodyPr>
-          <a:lstStyle/>
-          <a:p>
-            <a:r>
-              <a:rPr sz="2400" b="1">
-                <a:solidFill>
-                  <a:srgbClr val="141832"/>
-                </a:solidFill>
-                <a:latin typeface="Arial"/>
-              </a:rPr>
-              <a:t/>
-            </a:r>
-          </a:p>
-        </p:txBody>
-      </p:sp>
-      <p:sp>
-        <p:nvSpPr>
-          <p:cNvPr id="11" name="TextBox 10"/>
-          <p:cNvSpPr txBox="1"/>
-          <p:nvPr/>
-        </p:nvSpPr>
-        <p:spPr>
-          <a:xfrm>
-            <a:off x="731520" y="4069080"/>
-            <a:ext cx="10515600" cy="548640"/>
-          </a:xfrm>
-          <a:prstGeom prst="rect">
-            <a:avLst/>
-          </a:prstGeom>
-          <a:noFill/>
-        </p:spPr>
-        <p:txBody>
-          <a:bodyPr wrap="square">
-            <a:spAutoFit/>
-          </a:bodyPr>
-          <a:lstStyle/>
-          <a:p>
-            <a:r>
-              <a:rPr sz="1800" b="0">
-                <a:solidFill>
-                  <a:srgbClr val="1E1E1E"/>
-                </a:solidFill>
-                <a:latin typeface="Arial"/>
-              </a:rPr>
-              <a:t/>
-            </a:r>
           </a:p>
         </p:txBody>
       </p:sp>
@@ -5117,7 +4411,7 @@
             <a:avLst/>
           </a:prstGeom>
           <a:solidFill>
-            <a:srgbClr val="FAFAFC"/>
+            <a:srgbClr val="F5F5F5"/>
           </a:solidFill>
           <a:ln>
             <a:noFill/>
@@ -5147,24 +4441,25 @@
       </p:sp>
       <p:sp>
         <p:nvSpPr>
-          <p:cNvPr id="3" name="Rectangle 2"/>
+          <p:cNvPr id="3" name="Rounded Rectangle 2"/>
           <p:cNvSpPr/>
           <p:nvPr/>
         </p:nvSpPr>
         <p:spPr>
           <a:xfrm>
-            <a:off x="0" y="0"/>
-            <a:ext cx="274320" cy="6858000"/>
-          </a:xfrm>
-          <a:prstGeom prst="rect">
+            <a:off x="914400" y="1371600"/>
+            <a:ext cx="10362895" cy="4572000"/>
+          </a:xfrm>
+          <a:prstGeom prst="roundRect">
             <a:avLst/>
           </a:prstGeom>
           <a:solidFill>
-            <a:srgbClr val="FF6B35"/>
+            <a:srgbClr val="EBEBEB"/>
           </a:solidFill>
           <a:ln>
             <a:noFill/>
           </a:ln>
+          <a:effectLst/>
         </p:spPr>
         <p:style>
           <a:lnRef idx="1">
@@ -5196,8 +4491,8 @@
         </p:nvSpPr>
         <p:spPr>
           <a:xfrm>
-            <a:off x="731520" y="274320"/>
-            <a:ext cx="10515600" cy="914400"/>
+            <a:off x="914400" y="457200"/>
+            <a:ext cx="10362895" cy="914400"/>
           </a:xfrm>
           <a:prstGeom prst="rect">
             <a:avLst/>
@@ -5211,33 +4506,75 @@
           <a:lstStyle/>
           <a:p>
             <a:r>
-              <a:rPr sz="3600" b="1">
+              <a:rPr sz="4800" b="1">
                 <a:solidFill>
-                  <a:srgbClr val="141832"/>
+                  <a:srgbClr val="333333"/>
                 </a:solidFill>
-                <a:latin typeface="Arial"/>
+                <a:latin typeface="Google Sans"/>
               </a:rPr>
-              <a:t/>
-            </a:r>
-          </a:p>
-        </p:txBody>
-      </p:sp>
-      <p:sp>
-        <p:nvSpPr>
-          <p:cNvPr id="5" name="Rectangle 4"/>
+              <a:t>Запрос инвестиций</a:t>
+            </a:r>
+          </a:p>
+        </p:txBody>
+      </p:sp>
+      <p:sp>
+        <p:nvSpPr>
+          <p:cNvPr id="5" name="TextBox 4"/>
+          <p:cNvSpPr txBox="1"/>
+          <p:nvPr/>
+        </p:nvSpPr>
+        <p:spPr>
+          <a:xfrm>
+            <a:off x="1188720" y="1645920"/>
+            <a:ext cx="9814255" cy="4023360"/>
+          </a:xfrm>
+          <a:prstGeom prst="rect">
+            <a:avLst/>
+          </a:prstGeom>
+          <a:noFill/>
+        </p:spPr>
+        <p:txBody>
+          <a:bodyPr wrap="square">
+            <a:spAutoFit/>
+          </a:bodyPr>
+          <a:lstStyle/>
+          <a:p>
+            <a:r>
+              <a:rPr sz="2400" b="0">
+                <a:solidFill>
+                  <a:srgbClr val="333333"/>
+                </a:solidFill>
+                <a:latin typeface="Google Sans"/>
+              </a:rPr>
+              <a:t>Требуется 1 млн руб. гранта.</a:t>
+            </a:r>
+            <a:br/>
+            <a:r>
+              <a:t>45%: доработка продукта.</a:t>
+            </a:r>
+            <a:br/>
+            <a:r>
+              <a:t>55%: продажи и маркетинг.</a:t>
+            </a:r>
+          </a:p>
+        </p:txBody>
+      </p:sp>
+      <p:sp>
+        <p:nvSpPr>
+          <p:cNvPr id="6" name="Rectangle 5"/>
           <p:cNvSpPr/>
           <p:nvPr/>
         </p:nvSpPr>
         <p:spPr>
           <a:xfrm>
-            <a:off x="731520" y="1051560"/>
-            <a:ext cx="10515600" cy="27432"/>
+            <a:off x="0" y="914400"/>
+            <a:ext cx="182880" cy="5029200"/>
           </a:xfrm>
           <a:prstGeom prst="rect">
             <a:avLst/>
           </a:prstGeom>
           <a:solidFill>
-            <a:srgbClr val="FF6B35"/>
+            <a:srgbClr val="34BFA3"/>
           </a:solidFill>
           <a:ln>
             <a:noFill/>
@@ -5262,108 +4599,6 @@
           <a:lstStyle/>
           <a:p>
             <a:pPr algn="ctr"/>
-          </a:p>
-        </p:txBody>
-      </p:sp>
-      <p:sp>
-        <p:nvSpPr>
-          <p:cNvPr id="6" name="TextBox 5"/>
-          <p:cNvSpPr txBox="1"/>
-          <p:nvPr/>
-        </p:nvSpPr>
-        <p:spPr>
-          <a:xfrm>
-            <a:off x="731520" y="1371600"/>
-            <a:ext cx="10515600" cy="457200"/>
-          </a:xfrm>
-          <a:prstGeom prst="rect">
-            <a:avLst/>
-          </a:prstGeom>
-          <a:noFill/>
-        </p:spPr>
-        <p:txBody>
-          <a:bodyPr wrap="none">
-            <a:spAutoFit/>
-          </a:bodyPr>
-          <a:lstStyle/>
-          <a:p>
-            <a:r>
-              <a:rPr sz="2400" b="1">
-                <a:solidFill>
-                  <a:srgbClr val="141832"/>
-                </a:solidFill>
-                <a:latin typeface="Arial"/>
-              </a:rPr>
-              <a:t/>
-            </a:r>
-          </a:p>
-        </p:txBody>
-      </p:sp>
-      <p:sp>
-        <p:nvSpPr>
-          <p:cNvPr id="7" name="TextBox 6"/>
-          <p:cNvSpPr txBox="1"/>
-          <p:nvPr/>
-        </p:nvSpPr>
-        <p:spPr>
-          <a:xfrm>
-            <a:off x="731520" y="1920240"/>
-            <a:ext cx="10515600" cy="548640"/>
-          </a:xfrm>
-          <a:prstGeom prst="rect">
-            <a:avLst/>
-          </a:prstGeom>
-          <a:noFill/>
-        </p:spPr>
-        <p:txBody>
-          <a:bodyPr wrap="square">
-            <a:spAutoFit/>
-          </a:bodyPr>
-          <a:lstStyle/>
-          <a:p>
-            <a:r>
-              <a:rPr sz="1800" b="0">
-                <a:solidFill>
-                  <a:srgbClr val="1E1E1E"/>
-                </a:solidFill>
-                <a:latin typeface="Arial"/>
-              </a:rPr>
-              <a:t/>
-            </a:r>
-          </a:p>
-        </p:txBody>
-      </p:sp>
-      <p:sp>
-        <p:nvSpPr>
-          <p:cNvPr id="8" name="TextBox 7"/>
-          <p:cNvSpPr txBox="1"/>
-          <p:nvPr/>
-        </p:nvSpPr>
-        <p:spPr>
-          <a:xfrm>
-            <a:off x="731520" y="2423160"/>
-            <a:ext cx="10515600" cy="548640"/>
-          </a:xfrm>
-          <a:prstGeom prst="rect">
-            <a:avLst/>
-          </a:prstGeom>
-          <a:noFill/>
-        </p:spPr>
-        <p:txBody>
-          <a:bodyPr wrap="square">
-            <a:spAutoFit/>
-          </a:bodyPr>
-          <a:lstStyle/>
-          <a:p>
-            <a:r>
-              <a:rPr sz="1800" b="0">
-                <a:solidFill>
-                  <a:srgbClr val="1E1E1E"/>
-                </a:solidFill>
-                <a:latin typeface="Arial"/>
-              </a:rPr>
-              <a:t/>
-            </a:r>
           </a:p>
         </p:txBody>
       </p:sp>
@@ -5400,7 +4635,7 @@
             <a:avLst/>
           </a:prstGeom>
           <a:solidFill>
-            <a:srgbClr val="FAFAFC"/>
+            <a:srgbClr val="F5F5F5"/>
           </a:solidFill>
           <a:ln>
             <a:noFill/>
@@ -5430,24 +4665,25 @@
       </p:sp>
       <p:sp>
         <p:nvSpPr>
-          <p:cNvPr id="3" name="Rectangle 2"/>
+          <p:cNvPr id="3" name="Rounded Rectangle 2"/>
           <p:cNvSpPr/>
           <p:nvPr/>
         </p:nvSpPr>
         <p:spPr>
           <a:xfrm>
-            <a:off x="0" y="0"/>
-            <a:ext cx="274320" cy="6858000"/>
-          </a:xfrm>
-          <a:prstGeom prst="rect">
+            <a:off x="914400" y="1371600"/>
+            <a:ext cx="10362895" cy="4572000"/>
+          </a:xfrm>
+          <a:prstGeom prst="roundRect">
             <a:avLst/>
           </a:prstGeom>
           <a:solidFill>
-            <a:srgbClr val="FF6B35"/>
+            <a:srgbClr val="EBEBEB"/>
           </a:solidFill>
           <a:ln>
             <a:noFill/>
           </a:ln>
+          <a:effectLst/>
         </p:spPr>
         <p:style>
           <a:lnRef idx="1">
@@ -5479,8 +4715,8 @@
         </p:nvSpPr>
         <p:spPr>
           <a:xfrm>
-            <a:off x="731520" y="274320"/>
-            <a:ext cx="10515600" cy="914400"/>
+            <a:off x="914400" y="457200"/>
+            <a:ext cx="10362895" cy="914400"/>
           </a:xfrm>
           <a:prstGeom prst="rect">
             <a:avLst/>
@@ -5494,33 +4730,71 @@
           <a:lstStyle/>
           <a:p>
             <a:r>
-              <a:rPr sz="3600" b="1">
+              <a:rPr sz="4800" b="1">
                 <a:solidFill>
-                  <a:srgbClr val="141832"/>
+                  <a:srgbClr val="333333"/>
                 </a:solidFill>
-                <a:latin typeface="Arial"/>
+                <a:latin typeface="Google Sans"/>
               </a:rPr>
-              <a:t/>
-            </a:r>
-          </a:p>
-        </p:txBody>
-      </p:sp>
-      <p:sp>
-        <p:nvSpPr>
-          <p:cNvPr id="5" name="Rectangle 4"/>
+              <a:t>Команда: Семён</a:t>
+            </a:r>
+          </a:p>
+        </p:txBody>
+      </p:sp>
+      <p:sp>
+        <p:nvSpPr>
+          <p:cNvPr id="5" name="TextBox 4"/>
+          <p:cNvSpPr txBox="1"/>
+          <p:nvPr/>
+        </p:nvSpPr>
+        <p:spPr>
+          <a:xfrm>
+            <a:off x="1188720" y="1645920"/>
+            <a:ext cx="9814255" cy="4023360"/>
+          </a:xfrm>
+          <a:prstGeom prst="rect">
+            <a:avLst/>
+          </a:prstGeom>
+          <a:noFill/>
+        </p:spPr>
+        <p:txBody>
+          <a:bodyPr wrap="square">
+            <a:spAutoFit/>
+          </a:bodyPr>
+          <a:lstStyle/>
+          <a:p>
+            <a:r>
+              <a:rPr sz="2400" b="0">
+                <a:solidFill>
+                  <a:srgbClr val="333333"/>
+                </a:solidFill>
+                <a:latin typeface="Google Sans"/>
+              </a:rPr>
+              <a:t>Основатель, продукт.</a:t>
+            </a:r>
+            <a:br/>
+            <a:r>
+              <a:t>Опыт: 5 лет в IT, экс-продуктовый менеджер Яндекса.</a:t>
+            </a:r>
+          </a:p>
+        </p:txBody>
+      </p:sp>
+      <p:sp>
+        <p:nvSpPr>
+          <p:cNvPr id="6" name="Rectangle 5"/>
           <p:cNvSpPr/>
           <p:nvPr/>
         </p:nvSpPr>
         <p:spPr>
           <a:xfrm>
-            <a:off x="731520" y="1051560"/>
-            <a:ext cx="10515600" cy="27432"/>
+            <a:off x="0" y="914400"/>
+            <a:ext cx="182880" cy="5029200"/>
           </a:xfrm>
           <a:prstGeom prst="rect">
             <a:avLst/>
           </a:prstGeom>
           <a:solidFill>
-            <a:srgbClr val="FF6B35"/>
+            <a:srgbClr val="34BFA3"/>
           </a:solidFill>
           <a:ln>
             <a:noFill/>
@@ -5548,16 +4822,121 @@
           </a:p>
         </p:txBody>
       </p:sp>
-      <p:sp>
-        <p:nvSpPr>
-          <p:cNvPr id="6" name="TextBox 5"/>
+    </p:spTree>
+  </p:cSld>
+  <p:clrMapOvr>
+    <a:masterClrMapping/>
+  </p:clrMapOvr>
+</p:sld>
+</file>
+
+<file path=ppt/slides/slide17.xml><?xml version="1.0" encoding="utf-8"?>
+<p:sld xmlns:a="http://schemas.openxmlformats.org/drawingml/2006/main" xmlns:p="http://schemas.openxmlformats.org/presentationml/2006/main" xmlns:r="http://schemas.openxmlformats.org/officeDocument/2006/relationships">
+  <p:cSld>
+    <p:spTree>
+      <p:nvGrpSpPr>
+        <p:cNvPr id="1" name=""/>
+        <p:cNvGrpSpPr/>
+        <p:nvPr/>
+      </p:nvGrpSpPr>
+      <p:grpSpPr/>
+      <p:sp>
+        <p:nvSpPr>
+          <p:cNvPr id="2" name="Rectangle 1"/>
+          <p:cNvSpPr/>
+          <p:nvPr/>
+        </p:nvSpPr>
+        <p:spPr>
+          <a:xfrm>
+            <a:off x="0" y="0"/>
+            <a:ext cx="12191695" cy="6858000"/>
+          </a:xfrm>
+          <a:prstGeom prst="rect">
+            <a:avLst/>
+          </a:prstGeom>
+          <a:solidFill>
+            <a:srgbClr val="F5F5F5"/>
+          </a:solidFill>
+          <a:ln>
+            <a:noFill/>
+          </a:ln>
+        </p:spPr>
+        <p:style>
+          <a:lnRef idx="1">
+            <a:schemeClr val="accent1"/>
+          </a:lnRef>
+          <a:fillRef idx="3">
+            <a:schemeClr val="accent1"/>
+          </a:fillRef>
+          <a:effectRef idx="2">
+            <a:schemeClr val="accent1"/>
+          </a:effectRef>
+          <a:fontRef idx="minor">
+            <a:schemeClr val="lt1"/>
+          </a:fontRef>
+        </p:style>
+        <p:txBody>
+          <a:bodyPr rtlCol="0" anchor="ctr"/>
+          <a:lstStyle/>
+          <a:p>
+            <a:pPr algn="ctr"/>
+          </a:p>
+        </p:txBody>
+      </p:sp>
+      <p:sp>
+        <p:nvSpPr>
+          <p:cNvPr id="3" name="Rounded Rectangle 2"/>
+          <p:cNvSpPr/>
+          <p:nvPr/>
+        </p:nvSpPr>
+        <p:spPr>
+          <a:xfrm>
+            <a:off x="914400" y="1371600"/>
+            <a:ext cx="10362895" cy="4572000"/>
+          </a:xfrm>
+          <a:prstGeom prst="roundRect">
+            <a:avLst/>
+          </a:prstGeom>
+          <a:solidFill>
+            <a:srgbClr val="EBEBEB"/>
+          </a:solidFill>
+          <a:ln>
+            <a:noFill/>
+          </a:ln>
+          <a:effectLst/>
+        </p:spPr>
+        <p:style>
+          <a:lnRef idx="1">
+            <a:schemeClr val="accent1"/>
+          </a:lnRef>
+          <a:fillRef idx="3">
+            <a:schemeClr val="accent1"/>
+          </a:fillRef>
+          <a:effectRef idx="2">
+            <a:schemeClr val="accent1"/>
+          </a:effectRef>
+          <a:fontRef idx="minor">
+            <a:schemeClr val="lt1"/>
+          </a:fontRef>
+        </p:style>
+        <p:txBody>
+          <a:bodyPr rtlCol="0" anchor="ctr"/>
+          <a:lstStyle/>
+          <a:p>
+            <a:pPr algn="ctr"/>
+          </a:p>
+        </p:txBody>
+      </p:sp>
+      <p:sp>
+        <p:nvSpPr>
+          <p:cNvPr id="4" name="TextBox 3"/>
           <p:cNvSpPr txBox="1"/>
           <p:nvPr/>
         </p:nvSpPr>
         <p:spPr>
           <a:xfrm>
-            <a:off x="731520" y="1371600"/>
-            <a:ext cx="5029200" cy="457200"/>
+            <a:off x="914400" y="457200"/>
+            <a:ext cx="10362895" cy="914400"/>
           </a:xfrm>
           <a:prstGeom prst="rect">
             <a:avLst/>
@@ -5571,27 +4950,27 @@
           <a:lstStyle/>
           <a:p>
             <a:r>
-              <a:rPr sz="2400" b="1">
+              <a:rPr sz="4800" b="1">
                 <a:solidFill>
-                  <a:srgbClr val="141832"/>
+                  <a:srgbClr val="333333"/>
                 </a:solidFill>
-                <a:latin typeface="Arial"/>
+                <a:latin typeface="Google Sans"/>
               </a:rPr>
-              <a:t/>
-            </a:r>
-          </a:p>
-        </p:txBody>
-      </p:sp>
-      <p:sp>
-        <p:nvSpPr>
-          <p:cNvPr id="7" name="TextBox 6"/>
+              <a:t>Команда: Алексей</a:t>
+            </a:r>
+          </a:p>
+        </p:txBody>
+      </p:sp>
+      <p:sp>
+        <p:nvSpPr>
+          <p:cNvPr id="5" name="TextBox 4"/>
           <p:cNvSpPr txBox="1"/>
           <p:nvPr/>
         </p:nvSpPr>
         <p:spPr>
           <a:xfrm>
-            <a:off x="731520" y="1920240"/>
-            <a:ext cx="5029200" cy="4572000"/>
+            <a:off x="1188720" y="1645920"/>
+            <a:ext cx="9814255" cy="4023360"/>
           </a:xfrm>
           <a:prstGeom prst="rect">
             <a:avLst/>
@@ -5604,93 +4983,62 @@
           </a:bodyPr>
           <a:lstStyle/>
           <a:p>
-            <a:pPr>
-              <a:spcAft>
-                <a:spcPts val="800"/>
-              </a:spcAft>
-            </a:pPr>
-            <a:r>
-              <a:rPr sz="1800" b="0">
+            <a:r>
+              <a:rPr sz="2400" b="0">
                 <a:solidFill>
-                  <a:srgbClr val="505050"/>
+                  <a:srgbClr val="333333"/>
                 </a:solidFill>
-                <a:latin typeface="Arial"/>
+                <a:latin typeface="Google Sans"/>
               </a:rPr>
-              <a:t/>
-            </a:r>
-          </a:p>
-        </p:txBody>
-      </p:sp>
-      <p:sp>
-        <p:nvSpPr>
-          <p:cNvPr id="8" name="TextBox 7"/>
-          <p:cNvSpPr txBox="1"/>
-          <p:nvPr/>
-        </p:nvSpPr>
-        <p:spPr>
-          <a:xfrm>
-            <a:off x="6400800" y="1371600"/>
-            <a:ext cx="5029200" cy="457200"/>
+              <a:t>Основатель, технологии.</a:t>
+            </a:r>
+            <a:br/>
+            <a:r>
+              <a:t>Опыт: 7 лет разработки, fullstack разработчик.</a:t>
+            </a:r>
+          </a:p>
+        </p:txBody>
+      </p:sp>
+      <p:sp>
+        <p:nvSpPr>
+          <p:cNvPr id="6" name="Rectangle 5"/>
+          <p:cNvSpPr/>
+          <p:nvPr/>
+        </p:nvSpPr>
+        <p:spPr>
+          <a:xfrm>
+            <a:off x="0" y="914400"/>
+            <a:ext cx="182880" cy="5029200"/>
           </a:xfrm>
           <a:prstGeom prst="rect">
             <a:avLst/>
           </a:prstGeom>
-          <a:noFill/>
-        </p:spPr>
-        <p:txBody>
-          <a:bodyPr wrap="none">
-            <a:spAutoFit/>
-          </a:bodyPr>
-          <a:lstStyle/>
-          <a:p>
-            <a:r>
-              <a:rPr sz="2400" b="1">
-                <a:solidFill>
-                  <a:srgbClr val="141832"/>
-                </a:solidFill>
-                <a:latin typeface="Arial"/>
-              </a:rPr>
-              <a:t/>
-            </a:r>
-          </a:p>
-        </p:txBody>
-      </p:sp>
-      <p:sp>
-        <p:nvSpPr>
-          <p:cNvPr id="9" name="TextBox 8"/>
-          <p:cNvSpPr txBox="1"/>
-          <p:nvPr/>
-        </p:nvSpPr>
-        <p:spPr>
-          <a:xfrm>
-            <a:off x="6400800" y="1920240"/>
-            <a:ext cx="5029200" cy="4572000"/>
-          </a:xfrm>
-          <a:prstGeom prst="rect">
-            <a:avLst/>
-          </a:prstGeom>
-          <a:noFill/>
-        </p:spPr>
-        <p:txBody>
-          <a:bodyPr wrap="square">
-            <a:spAutoFit/>
-          </a:bodyPr>
-          <a:lstStyle/>
-          <a:p>
-            <a:pPr>
-              <a:spcAft>
-                <a:spcPts val="800"/>
-              </a:spcAft>
-            </a:pPr>
-            <a:r>
-              <a:rPr sz="1800" b="0">
-                <a:solidFill>
-                  <a:srgbClr val="505050"/>
-                </a:solidFill>
-                <a:latin typeface="Arial"/>
-              </a:rPr>
-              <a:t/>
-            </a:r>
+          <a:solidFill>
+            <a:srgbClr val="34BFA3"/>
+          </a:solidFill>
+          <a:ln>
+            <a:noFill/>
+          </a:ln>
+        </p:spPr>
+        <p:style>
+          <a:lnRef idx="1">
+            <a:schemeClr val="accent1"/>
+          </a:lnRef>
+          <a:fillRef idx="3">
+            <a:schemeClr val="accent1"/>
+          </a:fillRef>
+          <a:effectRef idx="2">
+            <a:schemeClr val="accent1"/>
+          </a:effectRef>
+          <a:fontRef idx="minor">
+            <a:schemeClr val="lt1"/>
+          </a:fontRef>
+        </p:style>
+        <p:txBody>
+          <a:bodyPr rtlCol="0" anchor="ctr"/>
+          <a:lstStyle/>
+          <a:p>
+            <a:pPr algn="ctr"/>
           </a:p>
         </p:txBody>
       </p:sp>
@@ -5727,7 +5075,7 @@
             <a:avLst/>
           </a:prstGeom>
           <a:solidFill>
-            <a:srgbClr val="FAFAFC"/>
+            <a:srgbClr val="F5F5F5"/>
           </a:solidFill>
           <a:ln>
             <a:noFill/>
@@ -5757,24 +5105,25 @@
       </p:sp>
       <p:sp>
         <p:nvSpPr>
-          <p:cNvPr id="3" name="Rectangle 2"/>
+          <p:cNvPr id="3" name="Rounded Rectangle 2"/>
           <p:cNvSpPr/>
           <p:nvPr/>
         </p:nvSpPr>
         <p:spPr>
           <a:xfrm>
-            <a:off x="0" y="0"/>
-            <a:ext cx="274320" cy="6858000"/>
-          </a:xfrm>
-          <a:prstGeom prst="rect">
+            <a:off x="914400" y="1371600"/>
+            <a:ext cx="10362895" cy="4572000"/>
+          </a:xfrm>
+          <a:prstGeom prst="roundRect">
             <a:avLst/>
           </a:prstGeom>
           <a:solidFill>
-            <a:srgbClr val="FF6B35"/>
+            <a:srgbClr val="EBEBEB"/>
           </a:solidFill>
           <a:ln>
             <a:noFill/>
           </a:ln>
+          <a:effectLst/>
         </p:spPr>
         <p:style>
           <a:lnRef idx="1">
@@ -5806,8 +5155,8 @@
         </p:nvSpPr>
         <p:spPr>
           <a:xfrm>
-            <a:off x="731520" y="274320"/>
-            <a:ext cx="10515600" cy="914400"/>
+            <a:off x="914400" y="457200"/>
+            <a:ext cx="10362895" cy="914400"/>
           </a:xfrm>
           <a:prstGeom prst="rect">
             <a:avLst/>
@@ -5821,33 +5170,71 @@
           <a:lstStyle/>
           <a:p>
             <a:r>
-              <a:rPr sz="3600" b="1">
+              <a:rPr sz="4800" b="1">
                 <a:solidFill>
-                  <a:srgbClr val="141832"/>
+                  <a:srgbClr val="333333"/>
                 </a:solidFill>
-                <a:latin typeface="Arial"/>
+                <a:latin typeface="Google Sans"/>
               </a:rPr>
-              <a:t/>
-            </a:r>
-          </a:p>
-        </p:txBody>
-      </p:sp>
-      <p:sp>
-        <p:nvSpPr>
-          <p:cNvPr id="5" name="Rectangle 4"/>
+              <a:t>Проблема: Отсутствие цифрового присутствия</a:t>
+            </a:r>
+          </a:p>
+        </p:txBody>
+      </p:sp>
+      <p:sp>
+        <p:nvSpPr>
+          <p:cNvPr id="5" name="TextBox 4"/>
+          <p:cNvSpPr txBox="1"/>
+          <p:nvPr/>
+        </p:nvSpPr>
+        <p:spPr>
+          <a:xfrm>
+            <a:off x="1188720" y="1645920"/>
+            <a:ext cx="9814255" cy="4023360"/>
+          </a:xfrm>
+          <a:prstGeom prst="rect">
+            <a:avLst/>
+          </a:prstGeom>
+          <a:noFill/>
+        </p:spPr>
+        <p:txBody>
+          <a:bodyPr wrap="square">
+            <a:spAutoFit/>
+          </a:bodyPr>
+          <a:lstStyle/>
+          <a:p>
+            <a:r>
+              <a:rPr sz="2400" b="0">
+                <a:solidFill>
+                  <a:srgbClr val="333333"/>
+                </a:solidFill>
+                <a:latin typeface="Google Sans"/>
+              </a:rPr>
+              <a:t>Большинство учреждений культуры не имеют современного сайта.</a:t>
+            </a:r>
+            <a:br/>
+            <a:r>
+              <a:t>Отсутствие онлайн-присутствия снижает доступность культуры для населения.</a:t>
+            </a:r>
+          </a:p>
+        </p:txBody>
+      </p:sp>
+      <p:sp>
+        <p:nvSpPr>
+          <p:cNvPr id="6" name="Rectangle 5"/>
           <p:cNvSpPr/>
           <p:nvPr/>
         </p:nvSpPr>
         <p:spPr>
           <a:xfrm>
-            <a:off x="731520" y="1051560"/>
-            <a:ext cx="10515600" cy="27432"/>
+            <a:off x="0" y="914400"/>
+            <a:ext cx="182880" cy="5029200"/>
           </a:xfrm>
           <a:prstGeom prst="rect">
             <a:avLst/>
           </a:prstGeom>
           <a:solidFill>
-            <a:srgbClr val="FF6B35"/>
+            <a:srgbClr val="34BFA3"/>
           </a:solidFill>
           <a:ln>
             <a:noFill/>
@@ -5872,142 +5259,6 @@
           <a:lstStyle/>
           <a:p>
             <a:pPr algn="ctr"/>
-          </a:p>
-        </p:txBody>
-      </p:sp>
-      <p:sp>
-        <p:nvSpPr>
-          <p:cNvPr id="6" name="TextBox 5"/>
-          <p:cNvSpPr txBox="1"/>
-          <p:nvPr/>
-        </p:nvSpPr>
-        <p:spPr>
-          <a:xfrm>
-            <a:off x="731520" y="1371600"/>
-            <a:ext cx="10515600" cy="457200"/>
-          </a:xfrm>
-          <a:prstGeom prst="rect">
-            <a:avLst/>
-          </a:prstGeom>
-          <a:noFill/>
-        </p:spPr>
-        <p:txBody>
-          <a:bodyPr wrap="none">
-            <a:spAutoFit/>
-          </a:bodyPr>
-          <a:lstStyle/>
-          <a:p>
-            <a:r>
-              <a:rPr sz="2400" b="1">
-                <a:solidFill>
-                  <a:srgbClr val="141832"/>
-                </a:solidFill>
-                <a:latin typeface="Arial"/>
-              </a:rPr>
-              <a:t/>
-            </a:r>
-          </a:p>
-        </p:txBody>
-      </p:sp>
-      <p:sp>
-        <p:nvSpPr>
-          <p:cNvPr id="7" name="TextBox 6"/>
-          <p:cNvSpPr txBox="1"/>
-          <p:nvPr/>
-        </p:nvSpPr>
-        <p:spPr>
-          <a:xfrm>
-            <a:off x="731520" y="1920240"/>
-            <a:ext cx="10515600" cy="548640"/>
-          </a:xfrm>
-          <a:prstGeom prst="rect">
-            <a:avLst/>
-          </a:prstGeom>
-          <a:noFill/>
-        </p:spPr>
-        <p:txBody>
-          <a:bodyPr wrap="square">
-            <a:spAutoFit/>
-          </a:bodyPr>
-          <a:lstStyle/>
-          <a:p>
-            <a:r>
-              <a:rPr sz="1800" b="0">
-                <a:solidFill>
-                  <a:srgbClr val="1E1E1E"/>
-                </a:solidFill>
-                <a:latin typeface="Arial"/>
-              </a:rPr>
-              <a:t/>
-            </a:r>
-          </a:p>
-        </p:txBody>
-      </p:sp>
-      <p:sp>
-        <p:nvSpPr>
-          <p:cNvPr id="8" name="TextBox 7"/>
-          <p:cNvSpPr txBox="1"/>
-          <p:nvPr/>
-        </p:nvSpPr>
-        <p:spPr>
-          <a:xfrm>
-            <a:off x="731520" y="2423160"/>
-            <a:ext cx="10515600" cy="457200"/>
-          </a:xfrm>
-          <a:prstGeom prst="rect">
-            <a:avLst/>
-          </a:prstGeom>
-          <a:noFill/>
-        </p:spPr>
-        <p:txBody>
-          <a:bodyPr wrap="none">
-            <a:spAutoFit/>
-          </a:bodyPr>
-          <a:lstStyle/>
-          <a:p>
-            <a:r>
-              <a:rPr sz="2400" b="1">
-                <a:solidFill>
-                  <a:srgbClr val="141832"/>
-                </a:solidFill>
-                <a:latin typeface="Arial"/>
-              </a:rPr>
-              <a:t/>
-            </a:r>
-          </a:p>
-        </p:txBody>
-      </p:sp>
-      <p:sp>
-        <p:nvSpPr>
-          <p:cNvPr id="9" name="TextBox 8"/>
-          <p:cNvSpPr txBox="1"/>
-          <p:nvPr/>
-        </p:nvSpPr>
-        <p:spPr>
-          <a:xfrm>
-            <a:off x="731520" y="2971800"/>
-            <a:ext cx="10515600" cy="548640"/>
-          </a:xfrm>
-          <a:prstGeom prst="rect">
-            <a:avLst/>
-          </a:prstGeom>
-          <a:noFill/>
-        </p:spPr>
-        <p:txBody>
-          <a:bodyPr wrap="square">
-            <a:spAutoFit/>
-          </a:bodyPr>
-          <a:lstStyle/>
-          <a:p>
-            <a:r>
-              <a:rPr sz="1800" b="0">
-                <a:solidFill>
-                  <a:srgbClr val="1E1E1E"/>
-                </a:solidFill>
-                <a:latin typeface="Arial"/>
-              </a:rPr>
-              <a:t/>
-            </a:r>
           </a:p>
         </p:txBody>
       </p:sp>
@@ -6044,7 +5295,7 @@
             <a:avLst/>
           </a:prstGeom>
           <a:solidFill>
-            <a:srgbClr val="FAFAFC"/>
+            <a:srgbClr val="F5F5F5"/>
           </a:solidFill>
           <a:ln>
             <a:noFill/>
@@ -6074,24 +5325,25 @@
       </p:sp>
       <p:sp>
         <p:nvSpPr>
-          <p:cNvPr id="3" name="Rectangle 2"/>
+          <p:cNvPr id="3" name="Rounded Rectangle 2"/>
           <p:cNvSpPr/>
           <p:nvPr/>
         </p:nvSpPr>
         <p:spPr>
           <a:xfrm>
-            <a:off x="0" y="0"/>
-            <a:ext cx="274320" cy="6858000"/>
-          </a:xfrm>
-          <a:prstGeom prst="rect">
+            <a:off x="914400" y="1371600"/>
+            <a:ext cx="10362895" cy="4572000"/>
+          </a:xfrm>
+          <a:prstGeom prst="roundRect">
             <a:avLst/>
           </a:prstGeom>
           <a:solidFill>
-            <a:srgbClr val="FF6B35"/>
+            <a:srgbClr val="EBEBEB"/>
           </a:solidFill>
           <a:ln>
             <a:noFill/>
           </a:ln>
+          <a:effectLst/>
         </p:spPr>
         <p:style>
           <a:lnRef idx="1">
@@ -6123,8 +5375,8 @@
         </p:nvSpPr>
         <p:spPr>
           <a:xfrm>
-            <a:off x="731520" y="274320"/>
-            <a:ext cx="10515600" cy="914400"/>
+            <a:off x="914400" y="457200"/>
+            <a:ext cx="10362895" cy="914400"/>
           </a:xfrm>
           <a:prstGeom prst="rect">
             <a:avLst/>
@@ -6138,33 +5390,71 @@
           <a:lstStyle/>
           <a:p>
             <a:r>
-              <a:rPr sz="3600" b="1">
+              <a:rPr sz="4800" b="1">
                 <a:solidFill>
-                  <a:srgbClr val="141832"/>
+                  <a:srgbClr val="333333"/>
                 </a:solidFill>
-                <a:latin typeface="Arial"/>
+                <a:latin typeface="Google Sans"/>
               </a:rPr>
-              <a:t/>
-            </a:r>
-          </a:p>
-        </p:txBody>
-      </p:sp>
-      <p:sp>
-        <p:nvSpPr>
-          <p:cNvPr id="5" name="Rectangle 4"/>
+              <a:t>Проблема: Высокая стоимость входа</a:t>
+            </a:r>
+          </a:p>
+        </p:txBody>
+      </p:sp>
+      <p:sp>
+        <p:nvSpPr>
+          <p:cNvPr id="5" name="TextBox 4"/>
+          <p:cNvSpPr txBox="1"/>
+          <p:nvPr/>
+        </p:nvSpPr>
+        <p:spPr>
+          <a:xfrm>
+            <a:off x="1188720" y="1645920"/>
+            <a:ext cx="9814255" cy="4023360"/>
+          </a:xfrm>
+          <a:prstGeom prst="rect">
+            <a:avLst/>
+          </a:prstGeom>
+          <a:noFill/>
+        </p:spPr>
+        <p:txBody>
+          <a:bodyPr wrap="square">
+            <a:spAutoFit/>
+          </a:bodyPr>
+          <a:lstStyle/>
+          <a:p>
+            <a:r>
+              <a:rPr sz="2400" b="0">
+                <a:solidFill>
+                  <a:srgbClr val="333333"/>
+                </a:solidFill>
+                <a:latin typeface="Google Sans"/>
+              </a:rPr>
+              <a:t>Разработка сайта с нуля стоит от 100 тыс. руб. и занимает 2-3 месяца.</a:t>
+            </a:r>
+            <a:br/>
+            <a:r>
+              <a:t>Малые учреждения не могут позволить такие расходы.</a:t>
+            </a:r>
+          </a:p>
+        </p:txBody>
+      </p:sp>
+      <p:sp>
+        <p:nvSpPr>
+          <p:cNvPr id="6" name="Rectangle 5"/>
           <p:cNvSpPr/>
           <p:nvPr/>
         </p:nvSpPr>
         <p:spPr>
           <a:xfrm>
-            <a:off x="731520" y="1051560"/>
-            <a:ext cx="10515600" cy="27432"/>
+            <a:off x="0" y="914400"/>
+            <a:ext cx="182880" cy="5029200"/>
           </a:xfrm>
           <a:prstGeom prst="rect">
             <a:avLst/>
           </a:prstGeom>
           <a:solidFill>
-            <a:srgbClr val="FF6B35"/>
+            <a:srgbClr val="34BFA3"/>
           </a:solidFill>
           <a:ln>
             <a:noFill/>
@@ -6189,74 +5479,6 @@
           <a:lstStyle/>
           <a:p>
             <a:pPr algn="ctr"/>
-          </a:p>
-        </p:txBody>
-      </p:sp>
-      <p:sp>
-        <p:nvSpPr>
-          <p:cNvPr id="6" name="TextBox 5"/>
-          <p:cNvSpPr txBox="1"/>
-          <p:nvPr/>
-        </p:nvSpPr>
-        <p:spPr>
-          <a:xfrm>
-            <a:off x="731520" y="1371600"/>
-            <a:ext cx="10515600" cy="457200"/>
-          </a:xfrm>
-          <a:prstGeom prst="rect">
-            <a:avLst/>
-          </a:prstGeom>
-          <a:noFill/>
-        </p:spPr>
-        <p:txBody>
-          <a:bodyPr wrap="none">
-            <a:spAutoFit/>
-          </a:bodyPr>
-          <a:lstStyle/>
-          <a:p>
-            <a:r>
-              <a:rPr sz="2400" b="1">
-                <a:solidFill>
-                  <a:srgbClr val="141832"/>
-                </a:solidFill>
-                <a:latin typeface="Arial"/>
-              </a:rPr>
-              <a:t/>
-            </a:r>
-          </a:p>
-        </p:txBody>
-      </p:sp>
-      <p:sp>
-        <p:nvSpPr>
-          <p:cNvPr id="7" name="TextBox 6"/>
-          <p:cNvSpPr txBox="1"/>
-          <p:nvPr/>
-        </p:nvSpPr>
-        <p:spPr>
-          <a:xfrm>
-            <a:off x="731520" y="1920240"/>
-            <a:ext cx="10515600" cy="548640"/>
-          </a:xfrm>
-          <a:prstGeom prst="rect">
-            <a:avLst/>
-          </a:prstGeom>
-          <a:noFill/>
-        </p:spPr>
-        <p:txBody>
-          <a:bodyPr wrap="square">
-            <a:spAutoFit/>
-          </a:bodyPr>
-          <a:lstStyle/>
-          <a:p>
-            <a:r>
-              <a:rPr sz="1800" b="0">
-                <a:solidFill>
-                  <a:srgbClr val="1E1E1E"/>
-                </a:solidFill>
-                <a:latin typeface="Arial"/>
-              </a:rPr>
-              <a:t/>
-            </a:r>
           </a:p>
         </p:txBody>
       </p:sp>
@@ -6293,7 +5515,7 @@
             <a:avLst/>
           </a:prstGeom>
           <a:solidFill>
-            <a:srgbClr val="FAFAFC"/>
+            <a:srgbClr val="F5F5F5"/>
           </a:solidFill>
           <a:ln>
             <a:noFill/>
@@ -6323,24 +5545,25 @@
       </p:sp>
       <p:sp>
         <p:nvSpPr>
-          <p:cNvPr id="3" name="Rectangle 2"/>
+          <p:cNvPr id="3" name="Rounded Rectangle 2"/>
           <p:cNvSpPr/>
           <p:nvPr/>
         </p:nvSpPr>
         <p:spPr>
           <a:xfrm>
-            <a:off x="0" y="0"/>
-            <a:ext cx="274320" cy="6858000"/>
-          </a:xfrm>
-          <a:prstGeom prst="rect">
+            <a:off x="914400" y="1371600"/>
+            <a:ext cx="10362895" cy="4572000"/>
+          </a:xfrm>
+          <a:prstGeom prst="roundRect">
             <a:avLst/>
           </a:prstGeom>
           <a:solidFill>
-            <a:srgbClr val="FF6B35"/>
+            <a:srgbClr val="EBEBEB"/>
           </a:solidFill>
           <a:ln>
             <a:noFill/>
           </a:ln>
+          <a:effectLst/>
         </p:spPr>
         <p:style>
           <a:lnRef idx="1">
@@ -6372,8 +5595,8 @@
         </p:nvSpPr>
         <p:spPr>
           <a:xfrm>
-            <a:off x="731520" y="274320"/>
-            <a:ext cx="10515600" cy="914400"/>
+            <a:off x="914400" y="457200"/>
+            <a:ext cx="10362895" cy="914400"/>
           </a:xfrm>
           <a:prstGeom prst="rect">
             <a:avLst/>
@@ -6387,33 +5610,71 @@
           <a:lstStyle/>
           <a:p>
             <a:r>
-              <a:rPr sz="3600" b="1">
+              <a:rPr sz="4800" b="1">
                 <a:solidFill>
-                  <a:srgbClr val="141832"/>
+                  <a:srgbClr val="333333"/>
                 </a:solidFill>
-                <a:latin typeface="Arial"/>
+                <a:latin typeface="Google Sans"/>
               </a:rPr>
-              <a:t/>
-            </a:r>
-          </a:p>
-        </p:txBody>
-      </p:sp>
-      <p:sp>
-        <p:nvSpPr>
-          <p:cNvPr id="5" name="Rectangle 4"/>
+              <a:t>Почему это важно сейчас</a:t>
+            </a:r>
+          </a:p>
+        </p:txBody>
+      </p:sp>
+      <p:sp>
+        <p:nvSpPr>
+          <p:cNvPr id="5" name="TextBox 4"/>
+          <p:cNvSpPr txBox="1"/>
+          <p:nvPr/>
+        </p:nvSpPr>
+        <p:spPr>
+          <a:xfrm>
+            <a:off x="1188720" y="1645920"/>
+            <a:ext cx="9814255" cy="4023360"/>
+          </a:xfrm>
+          <a:prstGeom prst="rect">
+            <a:avLst/>
+          </a:prstGeom>
+          <a:noFill/>
+        </p:spPr>
+        <p:txBody>
+          <a:bodyPr wrap="square">
+            <a:spAutoFit/>
+          </a:bodyPr>
+          <a:lstStyle/>
+          <a:p>
+            <a:r>
+              <a:rPr sz="2400" b="0">
+                <a:solidFill>
+                  <a:srgbClr val="333333"/>
+                </a:solidFill>
+                <a:latin typeface="Google Sans"/>
+              </a:rPr>
+              <a:t>Государственная программа "Цифровая культура" требует онлайн-присутствия.</a:t>
+            </a:r>
+            <a:br/>
+            <a:r>
+              <a:t>Рост спроса на онлайн-услуги после 2020 года.</a:t>
+            </a:r>
+          </a:p>
+        </p:txBody>
+      </p:sp>
+      <p:sp>
+        <p:nvSpPr>
+          <p:cNvPr id="6" name="Rectangle 5"/>
           <p:cNvSpPr/>
           <p:nvPr/>
         </p:nvSpPr>
         <p:spPr>
           <a:xfrm>
-            <a:off x="731520" y="1051560"/>
-            <a:ext cx="10515600" cy="27432"/>
+            <a:off x="0" y="914400"/>
+            <a:ext cx="182880" cy="5029200"/>
           </a:xfrm>
           <a:prstGeom prst="rect">
             <a:avLst/>
           </a:prstGeom>
           <a:solidFill>
-            <a:srgbClr val="FF6B35"/>
+            <a:srgbClr val="34BFA3"/>
           </a:solidFill>
           <a:ln>
             <a:noFill/>
@@ -6438,142 +5699,6 @@
           <a:lstStyle/>
           <a:p>
             <a:pPr algn="ctr"/>
-          </a:p>
-        </p:txBody>
-      </p:sp>
-      <p:sp>
-        <p:nvSpPr>
-          <p:cNvPr id="6" name="TextBox 5"/>
-          <p:cNvSpPr txBox="1"/>
-          <p:nvPr/>
-        </p:nvSpPr>
-        <p:spPr>
-          <a:xfrm>
-            <a:off x="731520" y="1371600"/>
-            <a:ext cx="10515600" cy="457200"/>
-          </a:xfrm>
-          <a:prstGeom prst="rect">
-            <a:avLst/>
-          </a:prstGeom>
-          <a:noFill/>
-        </p:spPr>
-        <p:txBody>
-          <a:bodyPr wrap="none">
-            <a:spAutoFit/>
-          </a:bodyPr>
-          <a:lstStyle/>
-          <a:p>
-            <a:r>
-              <a:rPr sz="2400" b="1">
-                <a:solidFill>
-                  <a:srgbClr val="141832"/>
-                </a:solidFill>
-                <a:latin typeface="Arial"/>
-              </a:rPr>
-              <a:t/>
-            </a:r>
-          </a:p>
-        </p:txBody>
-      </p:sp>
-      <p:sp>
-        <p:nvSpPr>
-          <p:cNvPr id="7" name="TextBox 6"/>
-          <p:cNvSpPr txBox="1"/>
-          <p:nvPr/>
-        </p:nvSpPr>
-        <p:spPr>
-          <a:xfrm>
-            <a:off x="731520" y="1920240"/>
-            <a:ext cx="10515600" cy="548640"/>
-          </a:xfrm>
-          <a:prstGeom prst="rect">
-            <a:avLst/>
-          </a:prstGeom>
-          <a:noFill/>
-        </p:spPr>
-        <p:txBody>
-          <a:bodyPr wrap="square">
-            <a:spAutoFit/>
-          </a:bodyPr>
-          <a:lstStyle/>
-          <a:p>
-            <a:r>
-              <a:rPr sz="1800" b="0">
-                <a:solidFill>
-                  <a:srgbClr val="1E1E1E"/>
-                </a:solidFill>
-                <a:latin typeface="Arial"/>
-              </a:rPr>
-              <a:t/>
-            </a:r>
-          </a:p>
-        </p:txBody>
-      </p:sp>
-      <p:sp>
-        <p:nvSpPr>
-          <p:cNvPr id="8" name="TextBox 7"/>
-          <p:cNvSpPr txBox="1"/>
-          <p:nvPr/>
-        </p:nvSpPr>
-        <p:spPr>
-          <a:xfrm>
-            <a:off x="731520" y="2423160"/>
-            <a:ext cx="10515600" cy="548640"/>
-          </a:xfrm>
-          <a:prstGeom prst="rect">
-            <a:avLst/>
-          </a:prstGeom>
-          <a:noFill/>
-        </p:spPr>
-        <p:txBody>
-          <a:bodyPr wrap="square">
-            <a:spAutoFit/>
-          </a:bodyPr>
-          <a:lstStyle/>
-          <a:p>
-            <a:r>
-              <a:rPr sz="1800" b="0">
-                <a:solidFill>
-                  <a:srgbClr val="1E1E1E"/>
-                </a:solidFill>
-                <a:latin typeface="Arial"/>
-              </a:rPr>
-              <a:t/>
-            </a:r>
-          </a:p>
-        </p:txBody>
-      </p:sp>
-      <p:sp>
-        <p:nvSpPr>
-          <p:cNvPr id="9" name="TextBox 8"/>
-          <p:cNvSpPr txBox="1"/>
-          <p:nvPr/>
-        </p:nvSpPr>
-        <p:spPr>
-          <a:xfrm>
-            <a:off x="731520" y="2926080"/>
-            <a:ext cx="10515600" cy="548640"/>
-          </a:xfrm>
-          <a:prstGeom prst="rect">
-            <a:avLst/>
-          </a:prstGeom>
-          <a:noFill/>
-        </p:spPr>
-        <p:txBody>
-          <a:bodyPr wrap="square">
-            <a:spAutoFit/>
-          </a:bodyPr>
-          <a:lstStyle/>
-          <a:p>
-            <a:r>
-              <a:rPr sz="1800" b="0">
-                <a:solidFill>
-                  <a:srgbClr val="1E1E1E"/>
-                </a:solidFill>
-                <a:latin typeface="Arial"/>
-              </a:rPr>
-              <a:t/>
-            </a:r>
           </a:p>
         </p:txBody>
       </p:sp>
@@ -6610,7 +5735,7 @@
             <a:avLst/>
           </a:prstGeom>
           <a:solidFill>
-            <a:srgbClr val="FAFAFC"/>
+            <a:srgbClr val="F5F5F5"/>
           </a:solidFill>
           <a:ln>
             <a:noFill/>
@@ -6640,24 +5765,25 @@
       </p:sp>
       <p:sp>
         <p:nvSpPr>
-          <p:cNvPr id="3" name="Rectangle 2"/>
+          <p:cNvPr id="3" name="Rounded Rectangle 2"/>
           <p:cNvSpPr/>
           <p:nvPr/>
         </p:nvSpPr>
         <p:spPr>
           <a:xfrm>
-            <a:off x="0" y="0"/>
-            <a:ext cx="274320" cy="6858000"/>
-          </a:xfrm>
-          <a:prstGeom prst="rect">
+            <a:off x="914400" y="1371600"/>
+            <a:ext cx="10362895" cy="4572000"/>
+          </a:xfrm>
+          <a:prstGeom prst="roundRect">
             <a:avLst/>
           </a:prstGeom>
           <a:solidFill>
-            <a:srgbClr val="FF6B35"/>
+            <a:srgbClr val="EBEBEB"/>
           </a:solidFill>
           <a:ln>
             <a:noFill/>
           </a:ln>
+          <a:effectLst/>
         </p:spPr>
         <p:style>
           <a:lnRef idx="1">
@@ -6689,8 +5815,8 @@
         </p:nvSpPr>
         <p:spPr>
           <a:xfrm>
-            <a:off x="731520" y="274320"/>
-            <a:ext cx="10515600" cy="914400"/>
+            <a:off x="914400" y="457200"/>
+            <a:ext cx="10362895" cy="914400"/>
           </a:xfrm>
           <a:prstGeom prst="rect">
             <a:avLst/>
@@ -6704,33 +5830,71 @@
           <a:lstStyle/>
           <a:p>
             <a:r>
-              <a:rPr sz="3600" b="1">
+              <a:rPr sz="4800" b="1">
                 <a:solidFill>
-                  <a:srgbClr val="141832"/>
+                  <a:srgbClr val="333333"/>
                 </a:solidFill>
-                <a:latin typeface="Arial"/>
+                <a:latin typeface="Google Sans"/>
               </a:rPr>
-              <a:t/>
-            </a:r>
-          </a:p>
-        </p:txBody>
-      </p:sp>
-      <p:sp>
-        <p:nvSpPr>
-          <p:cNvPr id="5" name="Rectangle 4"/>
+              <a:t>Наше решение</a:t>
+            </a:r>
+          </a:p>
+        </p:txBody>
+      </p:sp>
+      <p:sp>
+        <p:nvSpPr>
+          <p:cNvPr id="5" name="TextBox 4"/>
+          <p:cNvSpPr txBox="1"/>
+          <p:nvPr/>
+        </p:nvSpPr>
+        <p:spPr>
+          <a:xfrm>
+            <a:off x="1188720" y="1645920"/>
+            <a:ext cx="9814255" cy="4023360"/>
+          </a:xfrm>
+          <a:prstGeom prst="rect">
+            <a:avLst/>
+          </a:prstGeom>
+          <a:noFill/>
+        </p:spPr>
+        <p:txBody>
+          <a:bodyPr wrap="square">
+            <a:spAutoFit/>
+          </a:bodyPr>
+          <a:lstStyle/>
+          <a:p>
+            <a:r>
+              <a:rPr sz="2400" b="0">
+                <a:solidFill>
+                  <a:srgbClr val="333333"/>
+                </a:solidFill>
+                <a:latin typeface="Google Sans"/>
+              </a:rPr>
+              <a:t>Готовая отраслевая платформа с типовыми модулями.</a:t>
+            </a:r>
+            <a:br/>
+            <a:r>
+              <a:t>Внедрение за 1 неделю без программистов.</a:t>
+            </a:r>
+          </a:p>
+        </p:txBody>
+      </p:sp>
+      <p:sp>
+        <p:nvSpPr>
+          <p:cNvPr id="6" name="Rectangle 5"/>
           <p:cNvSpPr/>
           <p:nvPr/>
         </p:nvSpPr>
         <p:spPr>
           <a:xfrm>
-            <a:off x="731520" y="1051560"/>
-            <a:ext cx="10515600" cy="27432"/>
+            <a:off x="0" y="914400"/>
+            <a:ext cx="182880" cy="5029200"/>
           </a:xfrm>
           <a:prstGeom prst="rect">
             <a:avLst/>
           </a:prstGeom>
           <a:solidFill>
-            <a:srgbClr val="FF6B35"/>
+            <a:srgbClr val="34BFA3"/>
           </a:solidFill>
           <a:ln>
             <a:noFill/>
@@ -6755,244 +5919,6 @@
           <a:lstStyle/>
           <a:p>
             <a:pPr algn="ctr"/>
-          </a:p>
-        </p:txBody>
-      </p:sp>
-      <p:sp>
-        <p:nvSpPr>
-          <p:cNvPr id="6" name="TextBox 5"/>
-          <p:cNvSpPr txBox="1"/>
-          <p:nvPr/>
-        </p:nvSpPr>
-        <p:spPr>
-          <a:xfrm>
-            <a:off x="731520" y="1371600"/>
-            <a:ext cx="10515600" cy="548640"/>
-          </a:xfrm>
-          <a:prstGeom prst="rect">
-            <a:avLst/>
-          </a:prstGeom>
-          <a:noFill/>
-        </p:spPr>
-        <p:txBody>
-          <a:bodyPr wrap="square">
-            <a:spAutoFit/>
-          </a:bodyPr>
-          <a:lstStyle/>
-          <a:p>
-            <a:r>
-              <a:rPr sz="1800" b="0">
-                <a:solidFill>
-                  <a:srgbClr val="1E1E1E"/>
-                </a:solidFill>
-                <a:latin typeface="Arial"/>
-              </a:rPr>
-              <a:t/>
-            </a:r>
-          </a:p>
-        </p:txBody>
-      </p:sp>
-      <p:sp>
-        <p:nvSpPr>
-          <p:cNvPr id="7" name="TextBox 6"/>
-          <p:cNvSpPr txBox="1"/>
-          <p:nvPr/>
-        </p:nvSpPr>
-        <p:spPr>
-          <a:xfrm>
-            <a:off x="731520" y="1874520"/>
-            <a:ext cx="10515600" cy="457200"/>
-          </a:xfrm>
-          <a:prstGeom prst="rect">
-            <a:avLst/>
-          </a:prstGeom>
-          <a:noFill/>
-        </p:spPr>
-        <p:txBody>
-          <a:bodyPr wrap="none">
-            <a:spAutoFit/>
-          </a:bodyPr>
-          <a:lstStyle/>
-          <a:p>
-            <a:r>
-              <a:rPr sz="2400" b="1">
-                <a:solidFill>
-                  <a:srgbClr val="141832"/>
-                </a:solidFill>
-                <a:latin typeface="Arial"/>
-              </a:rPr>
-              <a:t/>
-            </a:r>
-          </a:p>
-        </p:txBody>
-      </p:sp>
-      <p:sp>
-        <p:nvSpPr>
-          <p:cNvPr id="8" name="TextBox 7"/>
-          <p:cNvSpPr txBox="1"/>
-          <p:nvPr/>
-        </p:nvSpPr>
-        <p:spPr>
-          <a:xfrm>
-            <a:off x="914400" y="2423160"/>
-            <a:ext cx="10332720" cy="457200"/>
-          </a:xfrm>
-          <a:prstGeom prst="rect">
-            <a:avLst/>
-          </a:prstGeom>
-          <a:noFill/>
-        </p:spPr>
-        <p:txBody>
-          <a:bodyPr wrap="square">
-            <a:spAutoFit/>
-          </a:bodyPr>
-          <a:lstStyle/>
-          <a:p>
-            <a:r>
-              <a:rPr sz="1800" b="0">
-                <a:solidFill>
-                  <a:srgbClr val="505050"/>
-                </a:solidFill>
-                <a:latin typeface="Arial"/>
-              </a:rPr>
-              <a:t/>
-            </a:r>
-          </a:p>
-        </p:txBody>
-      </p:sp>
-      <p:sp>
-        <p:nvSpPr>
-          <p:cNvPr id="9" name="TextBox 8"/>
-          <p:cNvSpPr txBox="1"/>
-          <p:nvPr/>
-        </p:nvSpPr>
-        <p:spPr>
-          <a:xfrm>
-            <a:off x="914400" y="2880360"/>
-            <a:ext cx="10332720" cy="457200"/>
-          </a:xfrm>
-          <a:prstGeom prst="rect">
-            <a:avLst/>
-          </a:prstGeom>
-          <a:noFill/>
-        </p:spPr>
-        <p:txBody>
-          <a:bodyPr wrap="square">
-            <a:spAutoFit/>
-          </a:bodyPr>
-          <a:lstStyle/>
-          <a:p>
-            <a:r>
-              <a:rPr sz="1800" b="0">
-                <a:solidFill>
-                  <a:srgbClr val="505050"/>
-                </a:solidFill>
-                <a:latin typeface="Arial"/>
-              </a:rPr>
-              <a:t/>
-            </a:r>
-          </a:p>
-        </p:txBody>
-      </p:sp>
-      <p:sp>
-        <p:nvSpPr>
-          <p:cNvPr id="10" name="TextBox 9"/>
-          <p:cNvSpPr txBox="1"/>
-          <p:nvPr/>
-        </p:nvSpPr>
-        <p:spPr>
-          <a:xfrm>
-            <a:off x="914400" y="3337560"/>
-            <a:ext cx="10332720" cy="457200"/>
-          </a:xfrm>
-          <a:prstGeom prst="rect">
-            <a:avLst/>
-          </a:prstGeom>
-          <a:noFill/>
-        </p:spPr>
-        <p:txBody>
-          <a:bodyPr wrap="square">
-            <a:spAutoFit/>
-          </a:bodyPr>
-          <a:lstStyle/>
-          <a:p>
-            <a:r>
-              <a:rPr sz="1800" b="0">
-                <a:solidFill>
-                  <a:srgbClr val="505050"/>
-                </a:solidFill>
-                <a:latin typeface="Arial"/>
-              </a:rPr>
-              <a:t/>
-            </a:r>
-          </a:p>
-        </p:txBody>
-      </p:sp>
-      <p:sp>
-        <p:nvSpPr>
-          <p:cNvPr id="11" name="TextBox 10"/>
-          <p:cNvSpPr txBox="1"/>
-          <p:nvPr/>
-        </p:nvSpPr>
-        <p:spPr>
-          <a:xfrm>
-            <a:off x="914400" y="3794760"/>
-            <a:ext cx="10332720" cy="457200"/>
-          </a:xfrm>
-          <a:prstGeom prst="rect">
-            <a:avLst/>
-          </a:prstGeom>
-          <a:noFill/>
-        </p:spPr>
-        <p:txBody>
-          <a:bodyPr wrap="square">
-            <a:spAutoFit/>
-          </a:bodyPr>
-          <a:lstStyle/>
-          <a:p>
-            <a:r>
-              <a:rPr sz="1800" b="0">
-                <a:solidFill>
-                  <a:srgbClr val="505050"/>
-                </a:solidFill>
-                <a:latin typeface="Arial"/>
-              </a:rPr>
-              <a:t/>
-            </a:r>
-          </a:p>
-        </p:txBody>
-      </p:sp>
-      <p:sp>
-        <p:nvSpPr>
-          <p:cNvPr id="12" name="TextBox 11"/>
-          <p:cNvSpPr txBox="1"/>
-          <p:nvPr/>
-        </p:nvSpPr>
-        <p:spPr>
-          <a:xfrm>
-            <a:off x="914400" y="4251960"/>
-            <a:ext cx="10332720" cy="457200"/>
-          </a:xfrm>
-          <a:prstGeom prst="rect">
-            <a:avLst/>
-          </a:prstGeom>
-          <a:noFill/>
-        </p:spPr>
-        <p:txBody>
-          <a:bodyPr wrap="square">
-            <a:spAutoFit/>
-          </a:bodyPr>
-          <a:lstStyle/>
-          <a:p>
-            <a:r>
-              <a:rPr sz="1800" b="0">
-                <a:solidFill>
-                  <a:srgbClr val="505050"/>
-                </a:solidFill>
-                <a:latin typeface="Arial"/>
-              </a:rPr>
-              <a:t/>
-            </a:r>
           </a:p>
         </p:txBody>
       </p:sp>
@@ -7029,7 +5955,7 @@
             <a:avLst/>
           </a:prstGeom>
           <a:solidFill>
-            <a:srgbClr val="FAFAFC"/>
+            <a:srgbClr val="F5F5F5"/>
           </a:solidFill>
           <a:ln>
             <a:noFill/>
@@ -7059,24 +5985,25 @@
       </p:sp>
       <p:sp>
         <p:nvSpPr>
-          <p:cNvPr id="3" name="Rectangle 2"/>
+          <p:cNvPr id="3" name="Rounded Rectangle 2"/>
           <p:cNvSpPr/>
           <p:nvPr/>
         </p:nvSpPr>
         <p:spPr>
           <a:xfrm>
-            <a:off x="0" y="0"/>
-            <a:ext cx="274320" cy="6858000"/>
-          </a:xfrm>
-          <a:prstGeom prst="rect">
+            <a:off x="914400" y="1371600"/>
+            <a:ext cx="10362895" cy="4572000"/>
+          </a:xfrm>
+          <a:prstGeom prst="roundRect">
             <a:avLst/>
           </a:prstGeom>
           <a:solidFill>
-            <a:srgbClr val="FF6B35"/>
+            <a:srgbClr val="EBEBEB"/>
           </a:solidFill>
           <a:ln>
             <a:noFill/>
           </a:ln>
+          <a:effectLst/>
         </p:spPr>
         <p:style>
           <a:lnRef idx="1">
@@ -7108,8 +6035,8 @@
         </p:nvSpPr>
         <p:spPr>
           <a:xfrm>
-            <a:off x="731520" y="274320"/>
-            <a:ext cx="10515600" cy="914400"/>
+            <a:off x="914400" y="457200"/>
+            <a:ext cx="10362895" cy="914400"/>
           </a:xfrm>
           <a:prstGeom prst="rect">
             <a:avLst/>
@@ -7123,33 +6050,79 @@
           <a:lstStyle/>
           <a:p>
             <a:r>
-              <a:rPr sz="3600" b="1">
+              <a:rPr sz="4800" b="1">
                 <a:solidFill>
-                  <a:srgbClr val="141832"/>
+                  <a:srgbClr val="333333"/>
                 </a:solidFill>
-                <a:latin typeface="Arial"/>
+                <a:latin typeface="Google Sans"/>
               </a:rPr>
-              <a:t/>
-            </a:r>
-          </a:p>
-        </p:txBody>
-      </p:sp>
-      <p:sp>
-        <p:nvSpPr>
-          <p:cNvPr id="5" name="Rectangle 4"/>
+              <a:t>Продукт: Что входит</a:t>
+            </a:r>
+          </a:p>
+        </p:txBody>
+      </p:sp>
+      <p:sp>
+        <p:nvSpPr>
+          <p:cNvPr id="5" name="TextBox 4"/>
+          <p:cNvSpPr txBox="1"/>
+          <p:nvPr/>
+        </p:nvSpPr>
+        <p:spPr>
+          <a:xfrm>
+            <a:off x="1188720" y="1645920"/>
+            <a:ext cx="9814255" cy="4023360"/>
+          </a:xfrm>
+          <a:prstGeom prst="rect">
+            <a:avLst/>
+          </a:prstGeom>
+          <a:noFill/>
+        </p:spPr>
+        <p:txBody>
+          <a:bodyPr wrap="square">
+            <a:spAutoFit/>
+          </a:bodyPr>
+          <a:lstStyle/>
+          <a:p>
+            <a:r>
+              <a:rPr sz="2400" b="0">
+                <a:solidFill>
+                  <a:srgbClr val="333333"/>
+                </a:solidFill>
+                <a:latin typeface="Google Sans"/>
+              </a:rPr>
+              <a:t>• Современный сайт учреждения</a:t>
+            </a:r>
+            <a:br/>
+            <a:r>
+              <a:t>• Система афиши и событий</a:t>
+            </a:r>
+            <a:br/>
+            <a:r>
+              <a:t>• Онлайн-запись на мероприятия</a:t>
+            </a:r>
+            <a:br/>
+            <a:r>
+              <a:t>• Админ-панель для сотрудников</a:t>
+            </a:r>
+          </a:p>
+        </p:txBody>
+      </p:sp>
+      <p:sp>
+        <p:nvSpPr>
+          <p:cNvPr id="6" name="Rectangle 5"/>
           <p:cNvSpPr/>
           <p:nvPr/>
         </p:nvSpPr>
         <p:spPr>
           <a:xfrm>
-            <a:off x="731520" y="1051560"/>
-            <a:ext cx="10515600" cy="27432"/>
+            <a:off x="0" y="914400"/>
+            <a:ext cx="182880" cy="5029200"/>
           </a:xfrm>
           <a:prstGeom prst="rect">
             <a:avLst/>
           </a:prstGeom>
           <a:solidFill>
-            <a:srgbClr val="FF6B35"/>
+            <a:srgbClr val="34BFA3"/>
           </a:solidFill>
           <a:ln>
             <a:noFill/>
@@ -7174,278 +6147,6 @@
           <a:lstStyle/>
           <a:p>
             <a:pPr algn="ctr"/>
-          </a:p>
-        </p:txBody>
-      </p:sp>
-      <p:sp>
-        <p:nvSpPr>
-          <p:cNvPr id="6" name="TextBox 5"/>
-          <p:cNvSpPr txBox="1"/>
-          <p:nvPr/>
-        </p:nvSpPr>
-        <p:spPr>
-          <a:xfrm>
-            <a:off x="731520" y="1371600"/>
-            <a:ext cx="10515600" cy="457200"/>
-          </a:xfrm>
-          <a:prstGeom prst="rect">
-            <a:avLst/>
-          </a:prstGeom>
-          <a:noFill/>
-        </p:spPr>
-        <p:txBody>
-          <a:bodyPr wrap="none">
-            <a:spAutoFit/>
-          </a:bodyPr>
-          <a:lstStyle/>
-          <a:p>
-            <a:r>
-              <a:rPr sz="2400" b="1">
-                <a:solidFill>
-                  <a:srgbClr val="141832"/>
-                </a:solidFill>
-                <a:latin typeface="Arial"/>
-              </a:rPr>
-              <a:t/>
-            </a:r>
-          </a:p>
-        </p:txBody>
-      </p:sp>
-      <p:sp>
-        <p:nvSpPr>
-          <p:cNvPr id="7" name="TextBox 6"/>
-          <p:cNvSpPr txBox="1"/>
-          <p:nvPr/>
-        </p:nvSpPr>
-        <p:spPr>
-          <a:xfrm>
-            <a:off x="914400" y="1920240"/>
-            <a:ext cx="10332720" cy="457200"/>
-          </a:xfrm>
-          <a:prstGeom prst="rect">
-            <a:avLst/>
-          </a:prstGeom>
-          <a:noFill/>
-        </p:spPr>
-        <p:txBody>
-          <a:bodyPr wrap="square">
-            <a:spAutoFit/>
-          </a:bodyPr>
-          <a:lstStyle/>
-          <a:p>
-            <a:r>
-              <a:rPr sz="1800" b="0">
-                <a:solidFill>
-                  <a:srgbClr val="505050"/>
-                </a:solidFill>
-                <a:latin typeface="Arial"/>
-              </a:rPr>
-              <a:t/>
-            </a:r>
-          </a:p>
-        </p:txBody>
-      </p:sp>
-      <p:sp>
-        <p:nvSpPr>
-          <p:cNvPr id="8" name="TextBox 7"/>
-          <p:cNvSpPr txBox="1"/>
-          <p:nvPr/>
-        </p:nvSpPr>
-        <p:spPr>
-          <a:xfrm>
-            <a:off x="914400" y="2377440"/>
-            <a:ext cx="10332720" cy="457200"/>
-          </a:xfrm>
-          <a:prstGeom prst="rect">
-            <a:avLst/>
-          </a:prstGeom>
-          <a:noFill/>
-        </p:spPr>
-        <p:txBody>
-          <a:bodyPr wrap="square">
-            <a:spAutoFit/>
-          </a:bodyPr>
-          <a:lstStyle/>
-          <a:p>
-            <a:r>
-              <a:rPr sz="1800" b="0">
-                <a:solidFill>
-                  <a:srgbClr val="505050"/>
-                </a:solidFill>
-                <a:latin typeface="Arial"/>
-              </a:rPr>
-              <a:t/>
-            </a:r>
-          </a:p>
-        </p:txBody>
-      </p:sp>
-      <p:sp>
-        <p:nvSpPr>
-          <p:cNvPr id="9" name="TextBox 8"/>
-          <p:cNvSpPr txBox="1"/>
-          <p:nvPr/>
-        </p:nvSpPr>
-        <p:spPr>
-          <a:xfrm>
-            <a:off x="914400" y="2834640"/>
-            <a:ext cx="10332720" cy="457200"/>
-          </a:xfrm>
-          <a:prstGeom prst="rect">
-            <a:avLst/>
-          </a:prstGeom>
-          <a:noFill/>
-        </p:spPr>
-        <p:txBody>
-          <a:bodyPr wrap="square">
-            <a:spAutoFit/>
-          </a:bodyPr>
-          <a:lstStyle/>
-          <a:p>
-            <a:r>
-              <a:rPr sz="1800" b="0">
-                <a:solidFill>
-                  <a:srgbClr val="505050"/>
-                </a:solidFill>
-                <a:latin typeface="Arial"/>
-              </a:rPr>
-              <a:t/>
-            </a:r>
-          </a:p>
-        </p:txBody>
-      </p:sp>
-      <p:sp>
-        <p:nvSpPr>
-          <p:cNvPr id="10" name="TextBox 9"/>
-          <p:cNvSpPr txBox="1"/>
-          <p:nvPr/>
-        </p:nvSpPr>
-        <p:spPr>
-          <a:xfrm>
-            <a:off x="914400" y="3291840"/>
-            <a:ext cx="10332720" cy="457200"/>
-          </a:xfrm>
-          <a:prstGeom prst="rect">
-            <a:avLst/>
-          </a:prstGeom>
-          <a:noFill/>
-        </p:spPr>
-        <p:txBody>
-          <a:bodyPr wrap="square">
-            <a:spAutoFit/>
-          </a:bodyPr>
-          <a:lstStyle/>
-          <a:p>
-            <a:r>
-              <a:rPr sz="1800" b="0">
-                <a:solidFill>
-                  <a:srgbClr val="505050"/>
-                </a:solidFill>
-                <a:latin typeface="Arial"/>
-              </a:rPr>
-              <a:t/>
-            </a:r>
-          </a:p>
-        </p:txBody>
-      </p:sp>
-      <p:sp>
-        <p:nvSpPr>
-          <p:cNvPr id="11" name="TextBox 10"/>
-          <p:cNvSpPr txBox="1"/>
-          <p:nvPr/>
-        </p:nvSpPr>
-        <p:spPr>
-          <a:xfrm>
-            <a:off x="914400" y="3749040"/>
-            <a:ext cx="10332720" cy="457200"/>
-          </a:xfrm>
-          <a:prstGeom prst="rect">
-            <a:avLst/>
-          </a:prstGeom>
-          <a:noFill/>
-        </p:spPr>
-        <p:txBody>
-          <a:bodyPr wrap="square">
-            <a:spAutoFit/>
-          </a:bodyPr>
-          <a:lstStyle/>
-          <a:p>
-            <a:r>
-              <a:rPr sz="1800" b="0">
-                <a:solidFill>
-                  <a:srgbClr val="505050"/>
-                </a:solidFill>
-                <a:latin typeface="Arial"/>
-              </a:rPr>
-              <a:t/>
-            </a:r>
-          </a:p>
-        </p:txBody>
-      </p:sp>
-      <p:sp>
-        <p:nvSpPr>
-          <p:cNvPr id="12" name="TextBox 11"/>
-          <p:cNvSpPr txBox="1"/>
-          <p:nvPr/>
-        </p:nvSpPr>
-        <p:spPr>
-          <a:xfrm>
-            <a:off x="914400" y="4206240"/>
-            <a:ext cx="10332720" cy="457200"/>
-          </a:xfrm>
-          <a:prstGeom prst="rect">
-            <a:avLst/>
-          </a:prstGeom>
-          <a:noFill/>
-        </p:spPr>
-        <p:txBody>
-          <a:bodyPr wrap="square">
-            <a:spAutoFit/>
-          </a:bodyPr>
-          <a:lstStyle/>
-          <a:p>
-            <a:r>
-              <a:rPr sz="1800" b="0">
-                <a:solidFill>
-                  <a:srgbClr val="505050"/>
-                </a:solidFill>
-                <a:latin typeface="Arial"/>
-              </a:rPr>
-              <a:t/>
-            </a:r>
-          </a:p>
-        </p:txBody>
-      </p:sp>
-      <p:sp>
-        <p:nvSpPr>
-          <p:cNvPr id="13" name="TextBox 12"/>
-          <p:cNvSpPr txBox="1"/>
-          <p:nvPr/>
-        </p:nvSpPr>
-        <p:spPr>
-          <a:xfrm>
-            <a:off x="731520" y="4663440"/>
-            <a:ext cx="10515600" cy="365760"/>
-          </a:xfrm>
-          <a:prstGeom prst="rect">
-            <a:avLst/>
-          </a:prstGeom>
-          <a:noFill/>
-        </p:spPr>
-        <p:txBody>
-          <a:bodyPr wrap="square">
-            <a:spAutoFit/>
-          </a:bodyPr>
-          <a:lstStyle/>
-          <a:p>
-            <a:r>
-              <a:rPr sz="1400" b="0">
-                <a:solidFill>
-                  <a:srgbClr val="505050"/>
-                </a:solidFill>
-                <a:latin typeface="Arial"/>
-              </a:rPr>
-              <a:t/>
-            </a:r>
           </a:p>
         </p:txBody>
       </p:sp>
@@ -7482,7 +6183,7 @@
             <a:avLst/>
           </a:prstGeom>
           <a:solidFill>
-            <a:srgbClr val="FAFAFC"/>
+            <a:srgbClr val="F5F5F5"/>
           </a:solidFill>
           <a:ln>
             <a:noFill/>
@@ -7512,24 +6213,25 @@
       </p:sp>
       <p:sp>
         <p:nvSpPr>
-          <p:cNvPr id="3" name="Rectangle 2"/>
+          <p:cNvPr id="3" name="Rounded Rectangle 2"/>
           <p:cNvSpPr/>
           <p:nvPr/>
         </p:nvSpPr>
         <p:spPr>
           <a:xfrm>
-            <a:off x="0" y="0"/>
-            <a:ext cx="274320" cy="6858000"/>
-          </a:xfrm>
-          <a:prstGeom prst="rect">
+            <a:off x="914400" y="1371600"/>
+            <a:ext cx="10362895" cy="4572000"/>
+          </a:xfrm>
+          <a:prstGeom prst="roundRect">
             <a:avLst/>
           </a:prstGeom>
           <a:solidFill>
-            <a:srgbClr val="FF6B35"/>
+            <a:srgbClr val="EBEBEB"/>
           </a:solidFill>
           <a:ln>
             <a:noFill/>
           </a:ln>
+          <a:effectLst/>
         </p:spPr>
         <p:style>
           <a:lnRef idx="1">
@@ -7561,8 +6263,8 @@
         </p:nvSpPr>
         <p:spPr>
           <a:xfrm>
-            <a:off x="731520" y="274320"/>
-            <a:ext cx="10515600" cy="914400"/>
+            <a:off x="914400" y="457200"/>
+            <a:ext cx="10362895" cy="914400"/>
           </a:xfrm>
           <a:prstGeom prst="rect">
             <a:avLst/>
@@ -7576,33 +6278,79 @@
           <a:lstStyle/>
           <a:p>
             <a:r>
-              <a:rPr sz="3600" b="1">
+              <a:rPr sz="4800" b="1">
                 <a:solidFill>
-                  <a:srgbClr val="141832"/>
+                  <a:srgbClr val="333333"/>
                 </a:solidFill>
-                <a:latin typeface="Arial"/>
+                <a:latin typeface="Google Sans"/>
               </a:rPr>
-              <a:t/>
-            </a:r>
-          </a:p>
-        </p:txBody>
-      </p:sp>
-      <p:sp>
-        <p:nvSpPr>
-          <p:cNvPr id="5" name="Rectangle 4"/>
+              <a:t>Ключевые модули</a:t>
+            </a:r>
+          </a:p>
+        </p:txBody>
+      </p:sp>
+      <p:sp>
+        <p:nvSpPr>
+          <p:cNvPr id="5" name="TextBox 4"/>
+          <p:cNvSpPr txBox="1"/>
+          <p:nvPr/>
+        </p:nvSpPr>
+        <p:spPr>
+          <a:xfrm>
+            <a:off x="1188720" y="1645920"/>
+            <a:ext cx="9814255" cy="4023360"/>
+          </a:xfrm>
+          <a:prstGeom prst="rect">
+            <a:avLst/>
+          </a:prstGeom>
+          <a:noFill/>
+        </p:spPr>
+        <p:txBody>
+          <a:bodyPr wrap="square">
+            <a:spAutoFit/>
+          </a:bodyPr>
+          <a:lstStyle/>
+          <a:p>
+            <a:r>
+              <a:rPr sz="2400" b="0">
+                <a:solidFill>
+                  <a:srgbClr val="333333"/>
+                </a:solidFill>
+                <a:latin typeface="Google Sans"/>
+              </a:rPr>
+              <a:t>Конструктор сайтов: шаблоны, блоки.</a:t>
+            </a:r>
+            <a:br/>
+            <a:r>
+              <a:t>Афиша: создание событий, категории.</a:t>
+            </a:r>
+            <a:br/>
+            <a:r>
+              <a:t>Запись: формы, уведомления.</a:t>
+            </a:r>
+            <a:br/>
+            <a:r>
+              <a:t>Аналитика: посещаемость, конверсия.</a:t>
+            </a:r>
+          </a:p>
+        </p:txBody>
+      </p:sp>
+      <p:sp>
+        <p:nvSpPr>
+          <p:cNvPr id="6" name="Rectangle 5"/>
           <p:cNvSpPr/>
           <p:nvPr/>
         </p:nvSpPr>
         <p:spPr>
           <a:xfrm>
-            <a:off x="731520" y="1051560"/>
-            <a:ext cx="10515600" cy="27432"/>
+            <a:off x="0" y="914400"/>
+            <a:ext cx="182880" cy="5029200"/>
           </a:xfrm>
           <a:prstGeom prst="rect">
             <a:avLst/>
           </a:prstGeom>
           <a:solidFill>
-            <a:srgbClr val="FF6B35"/>
+            <a:srgbClr val="34BFA3"/>
           </a:solidFill>
           <a:ln>
             <a:noFill/>
@@ -7627,210 +6375,6 @@
           <a:lstStyle/>
           <a:p>
             <a:pPr algn="ctr"/>
-          </a:p>
-        </p:txBody>
-      </p:sp>
-      <p:sp>
-        <p:nvSpPr>
-          <p:cNvPr id="6" name="TextBox 5"/>
-          <p:cNvSpPr txBox="1"/>
-          <p:nvPr/>
-        </p:nvSpPr>
-        <p:spPr>
-          <a:xfrm>
-            <a:off x="731520" y="1371600"/>
-            <a:ext cx="10515600" cy="457200"/>
-          </a:xfrm>
-          <a:prstGeom prst="rect">
-            <a:avLst/>
-          </a:prstGeom>
-          <a:noFill/>
-        </p:spPr>
-        <p:txBody>
-          <a:bodyPr wrap="none">
-            <a:spAutoFit/>
-          </a:bodyPr>
-          <a:lstStyle/>
-          <a:p>
-            <a:r>
-              <a:rPr sz="2400" b="1">
-                <a:solidFill>
-                  <a:srgbClr val="141832"/>
-                </a:solidFill>
-                <a:latin typeface="Arial"/>
-              </a:rPr>
-              <a:t/>
-            </a:r>
-          </a:p>
-        </p:txBody>
-      </p:sp>
-      <p:sp>
-        <p:nvSpPr>
-          <p:cNvPr id="7" name="TextBox 6"/>
-          <p:cNvSpPr txBox="1"/>
-          <p:nvPr/>
-        </p:nvSpPr>
-        <p:spPr>
-          <a:xfrm>
-            <a:off x="731520" y="1920240"/>
-            <a:ext cx="10515600" cy="548640"/>
-          </a:xfrm>
-          <a:prstGeom prst="rect">
-            <a:avLst/>
-          </a:prstGeom>
-          <a:noFill/>
-        </p:spPr>
-        <p:txBody>
-          <a:bodyPr wrap="square">
-            <a:spAutoFit/>
-          </a:bodyPr>
-          <a:lstStyle/>
-          <a:p>
-            <a:r>
-              <a:rPr sz="1800" b="0">
-                <a:solidFill>
-                  <a:srgbClr val="1E1E1E"/>
-                </a:solidFill>
-                <a:latin typeface="Arial"/>
-              </a:rPr>
-              <a:t/>
-            </a:r>
-          </a:p>
-        </p:txBody>
-      </p:sp>
-      <p:sp>
-        <p:nvSpPr>
-          <p:cNvPr id="8" name="TextBox 7"/>
-          <p:cNvSpPr txBox="1"/>
-          <p:nvPr/>
-        </p:nvSpPr>
-        <p:spPr>
-          <a:xfrm>
-            <a:off x="914400" y="2423160"/>
-            <a:ext cx="10332720" cy="457200"/>
-          </a:xfrm>
-          <a:prstGeom prst="rect">
-            <a:avLst/>
-          </a:prstGeom>
-          <a:noFill/>
-        </p:spPr>
-        <p:txBody>
-          <a:bodyPr wrap="square">
-            <a:spAutoFit/>
-          </a:bodyPr>
-          <a:lstStyle/>
-          <a:p>
-            <a:r>
-              <a:rPr sz="1800" b="0">
-                <a:solidFill>
-                  <a:srgbClr val="505050"/>
-                </a:solidFill>
-                <a:latin typeface="Arial"/>
-              </a:rPr>
-              <a:t/>
-            </a:r>
-          </a:p>
-        </p:txBody>
-      </p:sp>
-      <p:sp>
-        <p:nvSpPr>
-          <p:cNvPr id="9" name="TextBox 8"/>
-          <p:cNvSpPr txBox="1"/>
-          <p:nvPr/>
-        </p:nvSpPr>
-        <p:spPr>
-          <a:xfrm>
-            <a:off x="914400" y="2880360"/>
-            <a:ext cx="10332720" cy="457200"/>
-          </a:xfrm>
-          <a:prstGeom prst="rect">
-            <a:avLst/>
-          </a:prstGeom>
-          <a:noFill/>
-        </p:spPr>
-        <p:txBody>
-          <a:bodyPr wrap="square">
-            <a:spAutoFit/>
-          </a:bodyPr>
-          <a:lstStyle/>
-          <a:p>
-            <a:r>
-              <a:rPr sz="1800" b="0">
-                <a:solidFill>
-                  <a:srgbClr val="505050"/>
-                </a:solidFill>
-                <a:latin typeface="Arial"/>
-              </a:rPr>
-              <a:t/>
-            </a:r>
-          </a:p>
-        </p:txBody>
-      </p:sp>
-      <p:sp>
-        <p:nvSpPr>
-          <p:cNvPr id="10" name="TextBox 9"/>
-          <p:cNvSpPr txBox="1"/>
-          <p:nvPr/>
-        </p:nvSpPr>
-        <p:spPr>
-          <a:xfrm>
-            <a:off x="731520" y="3337560"/>
-            <a:ext cx="10515600" cy="365760"/>
-          </a:xfrm>
-          <a:prstGeom prst="rect">
-            <a:avLst/>
-          </a:prstGeom>
-          <a:noFill/>
-        </p:spPr>
-        <p:txBody>
-          <a:bodyPr wrap="square">
-            <a:spAutoFit/>
-          </a:bodyPr>
-          <a:lstStyle/>
-          <a:p>
-            <a:r>
-              <a:rPr sz="1400" b="0">
-                <a:solidFill>
-                  <a:srgbClr val="505050"/>
-                </a:solidFill>
-                <a:latin typeface="Arial"/>
-              </a:rPr>
-              <a:t/>
-            </a:r>
-          </a:p>
-        </p:txBody>
-      </p:sp>
-      <p:sp>
-        <p:nvSpPr>
-          <p:cNvPr id="11" name="TextBox 10"/>
-          <p:cNvSpPr txBox="1"/>
-          <p:nvPr/>
-        </p:nvSpPr>
-        <p:spPr>
-          <a:xfrm>
-            <a:off x="914400" y="3703320"/>
-            <a:ext cx="10332720" cy="457200"/>
-          </a:xfrm>
-          <a:prstGeom prst="rect">
-            <a:avLst/>
-          </a:prstGeom>
-          <a:noFill/>
-        </p:spPr>
-        <p:txBody>
-          <a:bodyPr wrap="square">
-            <a:spAutoFit/>
-          </a:bodyPr>
-          <a:lstStyle/>
-          <a:p>
-            <a:r>
-              <a:rPr sz="1800" b="0">
-                <a:solidFill>
-                  <a:srgbClr val="505050"/>
-                </a:solidFill>
-                <a:latin typeface="Arial"/>
-              </a:rPr>
-              <a:t/>
-            </a:r>
           </a:p>
         </p:txBody>
       </p:sp>
@@ -7867,7 +6411,7 @@
             <a:avLst/>
           </a:prstGeom>
           <a:solidFill>
-            <a:srgbClr val="FAFAFC"/>
+            <a:srgbClr val="F5F5F5"/>
           </a:solidFill>
           <a:ln>
             <a:noFill/>
@@ -7897,24 +6441,25 @@
       </p:sp>
       <p:sp>
         <p:nvSpPr>
-          <p:cNvPr id="3" name="Rectangle 2"/>
+          <p:cNvPr id="3" name="Rounded Rectangle 2"/>
           <p:cNvSpPr/>
           <p:nvPr/>
         </p:nvSpPr>
         <p:spPr>
           <a:xfrm>
-            <a:off x="0" y="0"/>
-            <a:ext cx="274320" cy="6858000"/>
-          </a:xfrm>
-          <a:prstGeom prst="rect">
+            <a:off x="914400" y="1371600"/>
+            <a:ext cx="10362895" cy="4572000"/>
+          </a:xfrm>
+          <a:prstGeom prst="roundRect">
             <a:avLst/>
           </a:prstGeom>
           <a:solidFill>
-            <a:srgbClr val="FF6B35"/>
+            <a:srgbClr val="EBEBEB"/>
           </a:solidFill>
           <a:ln>
             <a:noFill/>
           </a:ln>
+          <a:effectLst/>
         </p:spPr>
         <p:style>
           <a:lnRef idx="1">
@@ -7946,8 +6491,8 @@
         </p:nvSpPr>
         <p:spPr>
           <a:xfrm>
-            <a:off x="731520" y="274320"/>
-            <a:ext cx="10515600" cy="914400"/>
+            <a:off x="914400" y="457200"/>
+            <a:ext cx="10362895" cy="914400"/>
           </a:xfrm>
           <a:prstGeom prst="rect">
             <a:avLst/>
@@ -7961,33 +6506,75 @@
           <a:lstStyle/>
           <a:p>
             <a:r>
-              <a:rPr sz="3600" b="1">
+              <a:rPr sz="4800" b="1">
                 <a:solidFill>
-                  <a:srgbClr val="141832"/>
+                  <a:srgbClr val="333333"/>
                 </a:solidFill>
-                <a:latin typeface="Arial"/>
+                <a:latin typeface="Google Sans"/>
               </a:rPr>
-              <a:t/>
-            </a:r>
-          </a:p>
-        </p:txBody>
-      </p:sp>
-      <p:sp>
-        <p:nvSpPr>
-          <p:cNvPr id="5" name="Rectangle 4"/>
+              <a:t>Бизнес-модель</a:t>
+            </a:r>
+          </a:p>
+        </p:txBody>
+      </p:sp>
+      <p:sp>
+        <p:nvSpPr>
+          <p:cNvPr id="5" name="TextBox 4"/>
+          <p:cNvSpPr txBox="1"/>
+          <p:nvPr/>
+        </p:nvSpPr>
+        <p:spPr>
+          <a:xfrm>
+            <a:off x="1188720" y="1645920"/>
+            <a:ext cx="9814255" cy="4023360"/>
+          </a:xfrm>
+          <a:prstGeom prst="rect">
+            <a:avLst/>
+          </a:prstGeom>
+          <a:noFill/>
+        </p:spPr>
+        <p:txBody>
+          <a:bodyPr wrap="square">
+            <a:spAutoFit/>
+          </a:bodyPr>
+          <a:lstStyle/>
+          <a:p>
+            <a:r>
+              <a:rPr sz="2400" b="0">
+                <a:solidFill>
+                  <a:srgbClr val="333333"/>
+                </a:solidFill>
+                <a:latin typeface="Google Sans"/>
+              </a:rPr>
+              <a:t>Единовременная плата за внедрение: 29 000 руб.</a:t>
+            </a:r>
+            <a:br/>
+            <a:r>
+              <a:t>Ежемесячная подписка: 9 000 руб.</a:t>
+            </a:r>
+            <a:br/>
+            <a:r>
+              <a:t>Дополнительные услуги: обучение, доработки.</a:t>
+            </a:r>
+          </a:p>
+        </p:txBody>
+      </p:sp>
+      <p:sp>
+        <p:nvSpPr>
+          <p:cNvPr id="6" name="Rectangle 5"/>
           <p:cNvSpPr/>
           <p:nvPr/>
         </p:nvSpPr>
         <p:spPr>
           <a:xfrm>
-            <a:off x="731520" y="1051560"/>
-            <a:ext cx="10515600" cy="27432"/>
+            <a:off x="0" y="914400"/>
+            <a:ext cx="182880" cy="5029200"/>
           </a:xfrm>
           <a:prstGeom prst="rect">
             <a:avLst/>
           </a:prstGeom>
           <a:solidFill>
-            <a:srgbClr val="FF6B35"/>
+            <a:srgbClr val="34BFA3"/>
           </a:solidFill>
           <a:ln>
             <a:noFill/>
@@ -8012,312 +6599,6 @@
           <a:lstStyle/>
           <a:p>
             <a:pPr algn="ctr"/>
-          </a:p>
-        </p:txBody>
-      </p:sp>
-      <p:sp>
-        <p:nvSpPr>
-          <p:cNvPr id="6" name="TextBox 5"/>
-          <p:cNvSpPr txBox="1"/>
-          <p:nvPr/>
-        </p:nvSpPr>
-        <p:spPr>
-          <a:xfrm>
-            <a:off x="731520" y="1371600"/>
-            <a:ext cx="10515600" cy="457200"/>
-          </a:xfrm>
-          <a:prstGeom prst="rect">
-            <a:avLst/>
-          </a:prstGeom>
-          <a:noFill/>
-        </p:spPr>
-        <p:txBody>
-          <a:bodyPr wrap="none">
-            <a:spAutoFit/>
-          </a:bodyPr>
-          <a:lstStyle/>
-          <a:p>
-            <a:r>
-              <a:rPr sz="2400" b="1">
-                <a:solidFill>
-                  <a:srgbClr val="141832"/>
-                </a:solidFill>
-                <a:latin typeface="Arial"/>
-              </a:rPr>
-              <a:t/>
-            </a:r>
-          </a:p>
-        </p:txBody>
-      </p:sp>
-      <p:sp>
-        <p:nvSpPr>
-          <p:cNvPr id="7" name="TextBox 6"/>
-          <p:cNvSpPr txBox="1"/>
-          <p:nvPr/>
-        </p:nvSpPr>
-        <p:spPr>
-          <a:xfrm>
-            <a:off x="731520" y="1920240"/>
-            <a:ext cx="10515600" cy="548640"/>
-          </a:xfrm>
-          <a:prstGeom prst="rect">
-            <a:avLst/>
-          </a:prstGeom>
-          <a:noFill/>
-        </p:spPr>
-        <p:txBody>
-          <a:bodyPr wrap="square">
-            <a:spAutoFit/>
-          </a:bodyPr>
-          <a:lstStyle/>
-          <a:p>
-            <a:r>
-              <a:rPr sz="1800" b="0">
-                <a:solidFill>
-                  <a:srgbClr val="1E1E1E"/>
-                </a:solidFill>
-                <a:latin typeface="Arial"/>
-              </a:rPr>
-              <a:t/>
-            </a:r>
-          </a:p>
-        </p:txBody>
-      </p:sp>
-      <p:sp>
-        <p:nvSpPr>
-          <p:cNvPr id="8" name="TextBox 7"/>
-          <p:cNvSpPr txBox="1"/>
-          <p:nvPr/>
-        </p:nvSpPr>
-        <p:spPr>
-          <a:xfrm>
-            <a:off x="731520" y="2423160"/>
-            <a:ext cx="10515600" cy="457200"/>
-          </a:xfrm>
-          <a:prstGeom prst="rect">
-            <a:avLst/>
-          </a:prstGeom>
-          <a:noFill/>
-        </p:spPr>
-        <p:txBody>
-          <a:bodyPr wrap="none">
-            <a:spAutoFit/>
-          </a:bodyPr>
-          <a:lstStyle/>
-          <a:p>
-            <a:r>
-              <a:rPr sz="2400" b="1">
-                <a:solidFill>
-                  <a:srgbClr val="141832"/>
-                </a:solidFill>
-                <a:latin typeface="Arial"/>
-              </a:rPr>
-              <a:t/>
-            </a:r>
-          </a:p>
-        </p:txBody>
-      </p:sp>
-      <p:sp>
-        <p:nvSpPr>
-          <p:cNvPr id="9" name="TextBox 8"/>
-          <p:cNvSpPr txBox="1"/>
-          <p:nvPr/>
-        </p:nvSpPr>
-        <p:spPr>
-          <a:xfrm>
-            <a:off x="914400" y="2971800"/>
-            <a:ext cx="10332720" cy="457200"/>
-          </a:xfrm>
-          <a:prstGeom prst="rect">
-            <a:avLst/>
-          </a:prstGeom>
-          <a:noFill/>
-        </p:spPr>
-        <p:txBody>
-          <a:bodyPr wrap="square">
-            <a:spAutoFit/>
-          </a:bodyPr>
-          <a:lstStyle/>
-          <a:p>
-            <a:r>
-              <a:rPr sz="1800" b="0">
-                <a:solidFill>
-                  <a:srgbClr val="505050"/>
-                </a:solidFill>
-                <a:latin typeface="Arial"/>
-              </a:rPr>
-              <a:t/>
-            </a:r>
-          </a:p>
-        </p:txBody>
-      </p:sp>
-      <p:sp>
-        <p:nvSpPr>
-          <p:cNvPr id="10" name="TextBox 9"/>
-          <p:cNvSpPr txBox="1"/>
-          <p:nvPr/>
-        </p:nvSpPr>
-        <p:spPr>
-          <a:xfrm>
-            <a:off x="914400" y="3429000"/>
-            <a:ext cx="10332720" cy="457200"/>
-          </a:xfrm>
-          <a:prstGeom prst="rect">
-            <a:avLst/>
-          </a:prstGeom>
-          <a:noFill/>
-        </p:spPr>
-        <p:txBody>
-          <a:bodyPr wrap="square">
-            <a:spAutoFit/>
-          </a:bodyPr>
-          <a:lstStyle/>
-          <a:p>
-            <a:r>
-              <a:rPr sz="1800" b="0">
-                <a:solidFill>
-                  <a:srgbClr val="505050"/>
-                </a:solidFill>
-                <a:latin typeface="Arial"/>
-              </a:rPr>
-              <a:t/>
-            </a:r>
-          </a:p>
-        </p:txBody>
-      </p:sp>
-      <p:sp>
-        <p:nvSpPr>
-          <p:cNvPr id="11" name="TextBox 10"/>
-          <p:cNvSpPr txBox="1"/>
-          <p:nvPr/>
-        </p:nvSpPr>
-        <p:spPr>
-          <a:xfrm>
-            <a:off x="914400" y="3886200"/>
-            <a:ext cx="10332720" cy="457200"/>
-          </a:xfrm>
-          <a:prstGeom prst="rect">
-            <a:avLst/>
-          </a:prstGeom>
-          <a:noFill/>
-        </p:spPr>
-        <p:txBody>
-          <a:bodyPr wrap="square">
-            <a:spAutoFit/>
-          </a:bodyPr>
-          <a:lstStyle/>
-          <a:p>
-            <a:r>
-              <a:rPr sz="1800" b="0">
-                <a:solidFill>
-                  <a:srgbClr val="505050"/>
-                </a:solidFill>
-                <a:latin typeface="Arial"/>
-              </a:rPr>
-              <a:t/>
-            </a:r>
-          </a:p>
-        </p:txBody>
-      </p:sp>
-      <p:sp>
-        <p:nvSpPr>
-          <p:cNvPr id="12" name="TextBox 11"/>
-          <p:cNvSpPr txBox="1"/>
-          <p:nvPr/>
-        </p:nvSpPr>
-        <p:spPr>
-          <a:xfrm>
-            <a:off x="914400" y="4343400"/>
-            <a:ext cx="10332720" cy="457200"/>
-          </a:xfrm>
-          <a:prstGeom prst="rect">
-            <a:avLst/>
-          </a:prstGeom>
-          <a:noFill/>
-        </p:spPr>
-        <p:txBody>
-          <a:bodyPr wrap="square">
-            <a:spAutoFit/>
-          </a:bodyPr>
-          <a:lstStyle/>
-          <a:p>
-            <a:r>
-              <a:rPr sz="1800" b="0">
-                <a:solidFill>
-                  <a:srgbClr val="505050"/>
-                </a:solidFill>
-                <a:latin typeface="Arial"/>
-              </a:rPr>
-              <a:t/>
-            </a:r>
-          </a:p>
-        </p:txBody>
-      </p:sp>
-      <p:sp>
-        <p:nvSpPr>
-          <p:cNvPr id="13" name="TextBox 12"/>
-          <p:cNvSpPr txBox="1"/>
-          <p:nvPr/>
-        </p:nvSpPr>
-        <p:spPr>
-          <a:xfrm>
-            <a:off x="731520" y="4800600"/>
-            <a:ext cx="10515600" cy="457200"/>
-          </a:xfrm>
-          <a:prstGeom prst="rect">
-            <a:avLst/>
-          </a:prstGeom>
-          <a:noFill/>
-        </p:spPr>
-        <p:txBody>
-          <a:bodyPr wrap="none">
-            <a:spAutoFit/>
-          </a:bodyPr>
-          <a:lstStyle/>
-          <a:p>
-            <a:r>
-              <a:rPr sz="2400" b="1">
-                <a:solidFill>
-                  <a:srgbClr val="141832"/>
-                </a:solidFill>
-                <a:latin typeface="Arial"/>
-              </a:rPr>
-              <a:t/>
-            </a:r>
-          </a:p>
-        </p:txBody>
-      </p:sp>
-      <p:sp>
-        <p:nvSpPr>
-          <p:cNvPr id="14" name="TextBox 13"/>
-          <p:cNvSpPr txBox="1"/>
-          <p:nvPr/>
-        </p:nvSpPr>
-        <p:spPr>
-          <a:xfrm>
-            <a:off x="731520" y="5349240"/>
-            <a:ext cx="10515600" cy="548640"/>
-          </a:xfrm>
-          <a:prstGeom prst="rect">
-            <a:avLst/>
-          </a:prstGeom>
-          <a:noFill/>
-        </p:spPr>
-        <p:txBody>
-          <a:bodyPr wrap="square">
-            <a:spAutoFit/>
-          </a:bodyPr>
-          <a:lstStyle/>
-          <a:p>
-            <a:r>
-              <a:rPr sz="1800" b="0">
-                <a:solidFill>
-                  <a:srgbClr val="1E1E1E"/>
-                </a:solidFill>
-                <a:latin typeface="Arial"/>
-              </a:rPr>
-              <a:t/>
-            </a:r>
           </a:p>
         </p:txBody>
       </p:sp>
@@ -8354,7 +6635,7 @@
             <a:avLst/>
           </a:prstGeom>
           <a:solidFill>
-            <a:srgbClr val="FAFAFC"/>
+            <a:srgbClr val="F5F5F5"/>
           </a:solidFill>
           <a:ln>
             <a:noFill/>
@@ -8384,24 +6665,25 @@
       </p:sp>
       <p:sp>
         <p:nvSpPr>
-          <p:cNvPr id="3" name="Rectangle 2"/>
+          <p:cNvPr id="3" name="Rounded Rectangle 2"/>
           <p:cNvSpPr/>
           <p:nvPr/>
         </p:nvSpPr>
         <p:spPr>
           <a:xfrm>
-            <a:off x="0" y="0"/>
-            <a:ext cx="274320" cy="6858000"/>
-          </a:xfrm>
-          <a:prstGeom prst="rect">
+            <a:off x="914400" y="1371600"/>
+            <a:ext cx="10362895" cy="4572000"/>
+          </a:xfrm>
+          <a:prstGeom prst="roundRect">
             <a:avLst/>
           </a:prstGeom>
           <a:solidFill>
-            <a:srgbClr val="FF6B35"/>
+            <a:srgbClr val="EBEBEB"/>
           </a:solidFill>
           <a:ln>
             <a:noFill/>
           </a:ln>
+          <a:effectLst/>
         </p:spPr>
         <p:style>
           <a:lnRef idx="1">
@@ -8433,8 +6715,8 @@
         </p:nvSpPr>
         <p:spPr>
           <a:xfrm>
-            <a:off x="731520" y="274320"/>
-            <a:ext cx="10515600" cy="914400"/>
+            <a:off x="914400" y="457200"/>
+            <a:ext cx="10362895" cy="914400"/>
           </a:xfrm>
           <a:prstGeom prst="rect">
             <a:avLst/>
@@ -8448,33 +6730,71 @@
           <a:lstStyle/>
           <a:p>
             <a:r>
-              <a:rPr sz="3600" b="1">
+              <a:rPr sz="4800" b="1">
                 <a:solidFill>
-                  <a:srgbClr val="141832"/>
+                  <a:srgbClr val="333333"/>
                 </a:solidFill>
-                <a:latin typeface="Arial"/>
+                <a:latin typeface="Google Sans"/>
               </a:rPr>
-              <a:t/>
-            </a:r>
-          </a:p>
-        </p:txBody>
-      </p:sp>
-      <p:sp>
-        <p:nvSpPr>
-          <p:cNvPr id="5" name="Rectangle 4"/>
+              <a:t>Клиенты и Партнёры</a:t>
+            </a:r>
+          </a:p>
+        </p:txBody>
+      </p:sp>
+      <p:sp>
+        <p:nvSpPr>
+          <p:cNvPr id="5" name="TextBox 4"/>
+          <p:cNvSpPr txBox="1"/>
+          <p:nvPr/>
+        </p:nvSpPr>
+        <p:spPr>
+          <a:xfrm>
+            <a:off x="1188720" y="1645920"/>
+            <a:ext cx="9814255" cy="4023360"/>
+          </a:xfrm>
+          <a:prstGeom prst="rect">
+            <a:avLst/>
+          </a:prstGeom>
+          <a:noFill/>
+        </p:spPr>
+        <p:txBody>
+          <a:bodyPr wrap="square">
+            <a:spAutoFit/>
+          </a:bodyPr>
+          <a:lstStyle/>
+          <a:p>
+            <a:r>
+              <a:rPr sz="2400" b="0">
+                <a:solidFill>
+                  <a:srgbClr val="333333"/>
+                </a:solidFill>
+                <a:latin typeface="Google Sans"/>
+              </a:rPr>
+              <a:t>Клиенты: дома культуры, библиотеки, музеи, театры.</a:t>
+            </a:r>
+            <a:br/>
+            <a:r>
+              <a:t>Партнёры: региональные министерства, интеграторы.</a:t>
+            </a:r>
+          </a:p>
+        </p:txBody>
+      </p:sp>
+      <p:sp>
+        <p:nvSpPr>
+          <p:cNvPr id="6" name="Rectangle 5"/>
           <p:cNvSpPr/>
           <p:nvPr/>
         </p:nvSpPr>
         <p:spPr>
           <a:xfrm>
-            <a:off x="731520" y="1051560"/>
-            <a:ext cx="10515600" cy="27432"/>
+            <a:off x="0" y="914400"/>
+            <a:ext cx="182880" cy="5029200"/>
           </a:xfrm>
           <a:prstGeom prst="rect">
             <a:avLst/>
           </a:prstGeom>
           <a:solidFill>
-            <a:srgbClr val="FF6B35"/>
+            <a:srgbClr val="34BFA3"/>
           </a:solidFill>
           <a:ln>
             <a:noFill/>
@@ -8499,346 +6819,6 @@
           <a:lstStyle/>
           <a:p>
             <a:pPr algn="ctr"/>
-          </a:p>
-        </p:txBody>
-      </p:sp>
-      <p:sp>
-        <p:nvSpPr>
-          <p:cNvPr id="6" name="TextBox 5"/>
-          <p:cNvSpPr txBox="1"/>
-          <p:nvPr/>
-        </p:nvSpPr>
-        <p:spPr>
-          <a:xfrm>
-            <a:off x="731520" y="1371600"/>
-            <a:ext cx="10515600" cy="457200"/>
-          </a:xfrm>
-          <a:prstGeom prst="rect">
-            <a:avLst/>
-          </a:prstGeom>
-          <a:noFill/>
-        </p:spPr>
-        <p:txBody>
-          <a:bodyPr wrap="none">
-            <a:spAutoFit/>
-          </a:bodyPr>
-          <a:lstStyle/>
-          <a:p>
-            <a:r>
-              <a:rPr sz="2400" b="1">
-                <a:solidFill>
-                  <a:srgbClr val="141832"/>
-                </a:solidFill>
-                <a:latin typeface="Arial"/>
-              </a:rPr>
-              <a:t/>
-            </a:r>
-          </a:p>
-        </p:txBody>
-      </p:sp>
-      <p:sp>
-        <p:nvSpPr>
-          <p:cNvPr id="7" name="TextBox 6"/>
-          <p:cNvSpPr txBox="1"/>
-          <p:nvPr/>
-        </p:nvSpPr>
-        <p:spPr>
-          <a:xfrm>
-            <a:off x="731520" y="1920240"/>
-            <a:ext cx="10515600" cy="548640"/>
-          </a:xfrm>
-          <a:prstGeom prst="rect">
-            <a:avLst/>
-          </a:prstGeom>
-          <a:noFill/>
-        </p:spPr>
-        <p:txBody>
-          <a:bodyPr wrap="square">
-            <a:spAutoFit/>
-          </a:bodyPr>
-          <a:lstStyle/>
-          <a:p>
-            <a:r>
-              <a:rPr sz="1800" b="0">
-                <a:solidFill>
-                  <a:srgbClr val="1E1E1E"/>
-                </a:solidFill>
-                <a:latin typeface="Arial"/>
-              </a:rPr>
-              <a:t/>
-            </a:r>
-          </a:p>
-        </p:txBody>
-      </p:sp>
-      <p:sp>
-        <p:nvSpPr>
-          <p:cNvPr id="8" name="TextBox 7"/>
-          <p:cNvSpPr txBox="1"/>
-          <p:nvPr/>
-        </p:nvSpPr>
-        <p:spPr>
-          <a:xfrm>
-            <a:off x="731520" y="2423160"/>
-            <a:ext cx="10515600" cy="365760"/>
-          </a:xfrm>
-          <a:prstGeom prst="rect">
-            <a:avLst/>
-          </a:prstGeom>
-          <a:noFill/>
-        </p:spPr>
-        <p:txBody>
-          <a:bodyPr wrap="square">
-            <a:spAutoFit/>
-          </a:bodyPr>
-          <a:lstStyle/>
-          <a:p>
-            <a:r>
-              <a:rPr sz="1400" b="0">
-                <a:solidFill>
-                  <a:srgbClr val="505050"/>
-                </a:solidFill>
-                <a:latin typeface="Arial"/>
-              </a:rPr>
-              <a:t/>
-            </a:r>
-          </a:p>
-        </p:txBody>
-      </p:sp>
-      <p:sp>
-        <p:nvSpPr>
-          <p:cNvPr id="9" name="TextBox 8"/>
-          <p:cNvSpPr txBox="1"/>
-          <p:nvPr/>
-        </p:nvSpPr>
-        <p:spPr>
-          <a:xfrm>
-            <a:off x="731520" y="2788920"/>
-            <a:ext cx="10515600" cy="457200"/>
-          </a:xfrm>
-          <a:prstGeom prst="rect">
-            <a:avLst/>
-          </a:prstGeom>
-          <a:noFill/>
-        </p:spPr>
-        <p:txBody>
-          <a:bodyPr wrap="none">
-            <a:spAutoFit/>
-          </a:bodyPr>
-          <a:lstStyle/>
-          <a:p>
-            <a:r>
-              <a:rPr sz="2400" b="1">
-                <a:solidFill>
-                  <a:srgbClr val="141832"/>
-                </a:solidFill>
-                <a:latin typeface="Arial"/>
-              </a:rPr>
-              <a:t/>
-            </a:r>
-          </a:p>
-        </p:txBody>
-      </p:sp>
-      <p:sp>
-        <p:nvSpPr>
-          <p:cNvPr id="10" name="TextBox 9"/>
-          <p:cNvSpPr txBox="1"/>
-          <p:nvPr/>
-        </p:nvSpPr>
-        <p:spPr>
-          <a:xfrm>
-            <a:off x="731520" y="3337560"/>
-            <a:ext cx="10515600" cy="548640"/>
-          </a:xfrm>
-          <a:prstGeom prst="rect">
-            <a:avLst/>
-          </a:prstGeom>
-          <a:noFill/>
-        </p:spPr>
-        <p:txBody>
-          <a:bodyPr wrap="square">
-            <a:spAutoFit/>
-          </a:bodyPr>
-          <a:lstStyle/>
-          <a:p>
-            <a:r>
-              <a:rPr sz="1800" b="0">
-                <a:solidFill>
-                  <a:srgbClr val="1E1E1E"/>
-                </a:solidFill>
-                <a:latin typeface="Arial"/>
-              </a:rPr>
-              <a:t/>
-            </a:r>
-          </a:p>
-        </p:txBody>
-      </p:sp>
-      <p:sp>
-        <p:nvSpPr>
-          <p:cNvPr id="11" name="TextBox 10"/>
-          <p:cNvSpPr txBox="1"/>
-          <p:nvPr/>
-        </p:nvSpPr>
-        <p:spPr>
-          <a:xfrm>
-            <a:off x="731520" y="3840480"/>
-            <a:ext cx="10515600" cy="365760"/>
-          </a:xfrm>
-          <a:prstGeom prst="rect">
-            <a:avLst/>
-          </a:prstGeom>
-          <a:noFill/>
-        </p:spPr>
-        <p:txBody>
-          <a:bodyPr wrap="square">
-            <a:spAutoFit/>
-          </a:bodyPr>
-          <a:lstStyle/>
-          <a:p>
-            <a:r>
-              <a:rPr sz="1400" b="0">
-                <a:solidFill>
-                  <a:srgbClr val="505050"/>
-                </a:solidFill>
-                <a:latin typeface="Arial"/>
-              </a:rPr>
-              <a:t/>
-            </a:r>
-          </a:p>
-        </p:txBody>
-      </p:sp>
-      <p:sp>
-        <p:nvSpPr>
-          <p:cNvPr id="12" name="TextBox 11"/>
-          <p:cNvSpPr txBox="1"/>
-          <p:nvPr/>
-        </p:nvSpPr>
-        <p:spPr>
-          <a:xfrm>
-            <a:off x="731520" y="4206240"/>
-            <a:ext cx="10515600" cy="457200"/>
-          </a:xfrm>
-          <a:prstGeom prst="rect">
-            <a:avLst/>
-          </a:prstGeom>
-          <a:noFill/>
-        </p:spPr>
-        <p:txBody>
-          <a:bodyPr wrap="none">
-            <a:spAutoFit/>
-          </a:bodyPr>
-          <a:lstStyle/>
-          <a:p>
-            <a:r>
-              <a:rPr sz="2400" b="1">
-                <a:solidFill>
-                  <a:srgbClr val="141832"/>
-                </a:solidFill>
-                <a:latin typeface="Arial"/>
-              </a:rPr>
-              <a:t/>
-            </a:r>
-          </a:p>
-        </p:txBody>
-      </p:sp>
-      <p:sp>
-        <p:nvSpPr>
-          <p:cNvPr id="13" name="TextBox 12"/>
-          <p:cNvSpPr txBox="1"/>
-          <p:nvPr/>
-        </p:nvSpPr>
-        <p:spPr>
-          <a:xfrm>
-            <a:off x="731520" y="4754880"/>
-            <a:ext cx="10515600" cy="548640"/>
-          </a:xfrm>
-          <a:prstGeom prst="rect">
-            <a:avLst/>
-          </a:prstGeom>
-          <a:noFill/>
-        </p:spPr>
-        <p:txBody>
-          <a:bodyPr wrap="square">
-            <a:spAutoFit/>
-          </a:bodyPr>
-          <a:lstStyle/>
-          <a:p>
-            <a:r>
-              <a:rPr sz="1800" b="0">
-                <a:solidFill>
-                  <a:srgbClr val="1E1E1E"/>
-                </a:solidFill>
-                <a:latin typeface="Arial"/>
-              </a:rPr>
-              <a:t/>
-            </a:r>
-          </a:p>
-        </p:txBody>
-      </p:sp>
-      <p:sp>
-        <p:nvSpPr>
-          <p:cNvPr id="14" name="TextBox 13"/>
-          <p:cNvSpPr txBox="1"/>
-          <p:nvPr/>
-        </p:nvSpPr>
-        <p:spPr>
-          <a:xfrm>
-            <a:off x="731520" y="5257800"/>
-            <a:ext cx="10515600" cy="365760"/>
-          </a:xfrm>
-          <a:prstGeom prst="rect">
-            <a:avLst/>
-          </a:prstGeom>
-          <a:noFill/>
-        </p:spPr>
-        <p:txBody>
-          <a:bodyPr wrap="square">
-            <a:spAutoFit/>
-          </a:bodyPr>
-          <a:lstStyle/>
-          <a:p>
-            <a:r>
-              <a:rPr sz="1400" b="0">
-                <a:solidFill>
-                  <a:srgbClr val="505050"/>
-                </a:solidFill>
-                <a:latin typeface="Arial"/>
-              </a:rPr>
-              <a:t/>
-            </a:r>
-          </a:p>
-        </p:txBody>
-      </p:sp>
-      <p:sp>
-        <p:nvSpPr>
-          <p:cNvPr id="15" name="TextBox 14"/>
-          <p:cNvSpPr txBox="1"/>
-          <p:nvPr/>
-        </p:nvSpPr>
-        <p:spPr>
-          <a:xfrm>
-            <a:off x="731520" y="5623560"/>
-            <a:ext cx="10515600" cy="365760"/>
-          </a:xfrm>
-          <a:prstGeom prst="rect">
-            <a:avLst/>
-          </a:prstGeom>
-          <a:noFill/>
-        </p:spPr>
-        <p:txBody>
-          <a:bodyPr wrap="square">
-            <a:spAutoFit/>
-          </a:bodyPr>
-          <a:lstStyle/>
-          <a:p>
-            <a:r>
-              <a:rPr sz="1400" b="0">
-                <a:solidFill>
-                  <a:srgbClr val="505050"/>
-                </a:solidFill>
-                <a:latin typeface="Arial"/>
-              </a:rPr>
-              <a:t/>
-            </a:r>
           </a:p>
         </p:txBody>
       </p:sp>
